--- a/business-ethics/chapter-3/decks/Deck-1-Evaluating-Business-Ethics.pptx
+++ b/business-ethics/chapter-3/decks/Deck-1-Evaluating-Business-Ethics.pptx
@@ -4294,7 +4294,7 @@
         <p:spPr>
           <a:xfrm>
             <a:off x="1794053" y="457200"/>
-            <a:ext cx="1687068" cy="283464"/>
+            <a:ext cx="1506017" cy="283464"/>
           </a:xfrm>
           <a:prstGeom prst="roundRect">
             <a:avLst>
@@ -4321,7 +4321,7 @@
         <p:spPr>
           <a:xfrm>
             <a:off x="1794053" y="457200"/>
-            <a:ext cx="1687068" cy="283464"/>
+            <a:ext cx="1506017" cy="283464"/>
           </a:xfrm>
           <a:prstGeom prst="rect">
             <a:avLst/>
@@ -4345,7 +4345,7 @@
                 <a:ea typeface="Calibri" pitchFamily="34" charset="-122"/>
                 <a:cs typeface="Calibri" pitchFamily="34" charset="-120"/>
               </a:rPr>
-              <a:t>PRINCIPLE-BASED</a:t>
+              <a:t>IMMANUEL KANT</a:t>
             </a:r>
             <a:endParaRPr lang="en-US" sz="950" dirty="0"/>
           </a:p>
@@ -4426,7 +4426,7 @@
                 <a:ea typeface="Calibri" pitchFamily="34" charset="-122"/>
                 <a:cs typeface="Calibri" pitchFamily="34" charset="-120"/>
               </a:rPr>
-              <a:t>Ethics of Duties: Immanuel Kant</a:t>
+              <a:t>Ethics of Duties</a:t>
             </a:r>
             <a:pPr indent="0" marL="0">
               <a:lnSpc>
@@ -5427,7 +5427,7 @@
         <p:spPr>
           <a:xfrm>
             <a:off x="1794053" y="457200"/>
-            <a:ext cx="1687068" cy="283464"/>
+            <a:ext cx="1868119" cy="283464"/>
           </a:xfrm>
           <a:prstGeom prst="roundRect">
             <a:avLst>
@@ -5454,7 +5454,7 @@
         <p:spPr>
           <a:xfrm>
             <a:off x="1794053" y="457200"/>
-            <a:ext cx="1687068" cy="283464"/>
+            <a:ext cx="1868119" cy="283464"/>
           </a:xfrm>
           <a:prstGeom prst="rect">
             <a:avLst/>
@@ -5478,7 +5478,7 @@
                 <a:ea typeface="Calibri" pitchFamily="34" charset="-122"/>
                 <a:cs typeface="Calibri" pitchFamily="34" charset="-120"/>
               </a:rPr>
-              <a:t>PRINCIPLE-BASED</a:t>
+              <a:t>HAK ASASI MANUSIA</a:t>
             </a:r>
             <a:endParaRPr lang="en-US" sz="950" dirty="0"/>
           </a:p>
@@ -5559,7 +5559,7 @@
                 <a:ea typeface="Calibri" pitchFamily="34" charset="-122"/>
                 <a:cs typeface="Calibri" pitchFamily="34" charset="-120"/>
               </a:rPr>
-              <a:t>Ethics of Rights: Hak Asasi Manusia</a:t>
+              <a:t>Ethics of Rights</a:t>
             </a:r>
             <a:pPr indent="0" marL="0">
               <a:lnSpc>
@@ -6759,7 +6759,7 @@
         <p:spPr>
           <a:xfrm>
             <a:off x="1794053" y="457200"/>
-            <a:ext cx="1687068" cy="283464"/>
+            <a:ext cx="1234440" cy="283464"/>
           </a:xfrm>
           <a:prstGeom prst="roundRect">
             <a:avLst>
@@ -6786,7 +6786,7 @@
         <p:spPr>
           <a:xfrm>
             <a:off x="1794053" y="457200"/>
-            <a:ext cx="1687068" cy="283464"/>
+            <a:ext cx="1234440" cy="283464"/>
           </a:xfrm>
           <a:prstGeom prst="rect">
             <a:avLst/>
@@ -6810,7 +6810,7 @@
                 <a:ea typeface="Calibri" pitchFamily="34" charset="-122"/>
                 <a:cs typeface="Calibri" pitchFamily="34" charset="-120"/>
               </a:rPr>
-              <a:t>PRINCIPLE-BASED</a:t>
+              <a:t>JOHN RAWLS</a:t>
             </a:r>
             <a:endParaRPr lang="en-US" sz="950" dirty="0"/>
           </a:p>
@@ -6891,7 +6891,7 @@
                 <a:ea typeface="Calibri" pitchFamily="34" charset="-122"/>
                 <a:cs typeface="Calibri" pitchFamily="34" charset="-120"/>
               </a:rPr>
-              <a:t>Justice: John Rawls</a:t>
+              <a:t>Theory of Justice</a:t>
             </a:r>
             <a:pPr indent="0" marL="0">
               <a:lnSpc>
@@ -7565,7 +7565,7 @@
         <p:spPr>
           <a:xfrm>
             <a:off x="621792" y="457200"/>
-            <a:ext cx="1868119" cy="283464"/>
+            <a:ext cx="1324966" cy="283464"/>
           </a:xfrm>
           <a:prstGeom prst="roundRect">
             <a:avLst>
@@ -7592,7 +7592,7 @@
         <p:spPr>
           <a:xfrm>
             <a:off x="621792" y="457200"/>
-            <a:ext cx="1868119" cy="283464"/>
+            <a:ext cx="1324966" cy="283464"/>
           </a:xfrm>
           <a:prstGeom prst="rect">
             <a:avLst/>
@@ -7616,7 +7616,7 @@
                 <a:ea typeface="Calibri" pitchFamily="34" charset="-122"/>
                 <a:cs typeface="Calibri" pitchFamily="34" charset="-120"/>
               </a:rPr>
-              <a:t>BATAS TEORI BARAT</a:t>
+              <a:t>ENAM KRITIK</a:t>
             </a:r>
             <a:endParaRPr lang="en-US" sz="950" dirty="0"/>
           </a:p>
@@ -7630,7 +7630,7 @@
         </p:nvSpPr>
         <p:spPr>
           <a:xfrm>
-            <a:off x="2608783" y="457200"/>
+            <a:off x="2065630" y="457200"/>
             <a:ext cx="1324966" cy="283464"/>
           </a:xfrm>
           <a:prstGeom prst="roundRect">
@@ -7657,7 +7657,7 @@
         </p:nvSpPr>
         <p:spPr>
           <a:xfrm>
-            <a:off x="2608783" y="457200"/>
+            <a:off x="2065630" y="457200"/>
             <a:ext cx="1324966" cy="283464"/>
           </a:xfrm>
           <a:prstGeom prst="rect">
@@ -7763,7 +7763,7 @@
                 <a:ea typeface="Calibri" pitchFamily="34" charset="-122"/>
                 <a:cs typeface="Calibri" pitchFamily="34" charset="-120"/>
               </a:rPr>
-              <a:t>Enam Kritik terhadap Teori Barat Modern</a:t>
+              <a:t>Kritik atas Teori Barat Modern</a:t>
             </a:r>
             <a:pPr indent="0" marL="0">
               <a:lnSpc>
@@ -9065,7 +9065,7 @@
         <p:spPr>
           <a:xfrm>
             <a:off x="621792" y="457200"/>
-            <a:ext cx="1234440" cy="283464"/>
+            <a:ext cx="1777594" cy="283464"/>
           </a:xfrm>
           <a:prstGeom prst="roundRect">
             <a:avLst>
@@ -9092,7 +9092,7 @@
         <p:spPr>
           <a:xfrm>
             <a:off x="621792" y="457200"/>
-            <a:ext cx="1234440" cy="283464"/>
+            <a:ext cx="1777594" cy="283464"/>
           </a:xfrm>
           <a:prstGeom prst="rect">
             <a:avLst/>
@@ -9116,7 +9116,7 @@
                 <a:ea typeface="Calibri" pitchFamily="34" charset="-122"/>
                 <a:cs typeface="Calibri" pitchFamily="34" charset="-120"/>
               </a:rPr>
-              <a:t>ALTERNATIF</a:t>
+              <a:t>EMPAT ALTERNATIF</a:t>
             </a:r>
             <a:endParaRPr lang="en-US" sz="950" dirty="0"/>
           </a:p>
@@ -9130,7 +9130,7 @@
         </p:nvSpPr>
         <p:spPr>
           <a:xfrm>
-            <a:off x="1975104" y="457200"/>
+            <a:off x="2518258" y="457200"/>
             <a:ext cx="1687068" cy="283464"/>
           </a:xfrm>
           <a:prstGeom prst="roundRect">
@@ -9157,7 +9157,7 @@
         </p:nvSpPr>
         <p:spPr>
           <a:xfrm>
-            <a:off x="1975104" y="457200"/>
+            <a:off x="2518258" y="457200"/>
             <a:ext cx="1687068" cy="283464"/>
           </a:xfrm>
           <a:prstGeom prst="rect">
@@ -9263,7 +9263,7 @@
                 <a:ea typeface="Calibri" pitchFamily="34" charset="-122"/>
                 <a:cs typeface="Calibri" pitchFamily="34" charset="-120"/>
               </a:rPr>
-              <a:t>Empat Perspektif Alternatif</a:t>
+              <a:t>Perspektif Alternatif</a:t>
             </a:r>
             <a:pPr indent="0" marL="0">
               <a:lnSpc>
@@ -9322,7 +9322,7 @@
                 <a:ea typeface="Calibri" pitchFamily="34" charset="-122"/>
                 <a:cs typeface="Calibri" pitchFamily="34" charset="-120"/>
               </a:rPr>
-              <a:t>Lebih fleksibel, lebih memperhatikan pengambil keputusan, konteks, dan relasinya.</a:t>
+              <a:t>Menekankan fleksibilitas serta konteks dan relasi pengambil keputusan.</a:t>
             </a:r>
             <a:endParaRPr lang="en-US" sz="1350" dirty="0"/>
           </a:p>
@@ -12894,7 +12894,7 @@
                 <a:ea typeface="Calibri" pitchFamily="34" charset="-122"/>
                 <a:cs typeface="Calibri" pitchFamily="34" charset="-120"/>
               </a:rPr>
-              <a:t>Angka dari Kedua Sisi Sama Besarnya</a:t>
+              <a:t>Manfaat Ekonomi dan Biaya Ekologis</a:t>
             </a:r>
             <a:pPr indent="0" marL="0">
               <a:lnSpc>
@@ -13443,7 +13443,7 @@
                 <a:ea typeface="Calibri" pitchFamily="34" charset="-122"/>
                 <a:cs typeface="Calibri" pitchFamily="34" charset="-120"/>
               </a:rPr>
-              <a:t>Yang Dihitung Pendukung</a:t>
+              <a:t>Perhitungan Pendukung</a:t>
             </a:r>
             <a:endParaRPr lang="en-US" sz="1600" dirty="0"/>
           </a:p>
@@ -13609,7 +13609,7 @@
                 <a:ea typeface="Calibri" pitchFamily="34" charset="-122"/>
                 <a:cs typeface="Calibri" pitchFamily="34" charset="-120"/>
               </a:rPr>
-              <a:t>Yang Dihitung Penentang</a:t>
+              <a:t>Perhitungan Penentang</a:t>
             </a:r>
             <a:endParaRPr lang="en-US" sz="1600" dirty="0"/>
           </a:p>
@@ -13908,7 +13908,7 @@
         <p:spPr>
           <a:xfrm>
             <a:off x="1522476" y="457200"/>
-            <a:ext cx="1234440" cy="283464"/>
+            <a:ext cx="1958645" cy="283464"/>
           </a:xfrm>
           <a:prstGeom prst="roundRect">
             <a:avLst>
@@ -13935,7 +13935,7 @@
         <p:spPr>
           <a:xfrm>
             <a:off x="1522476" y="457200"/>
-            <a:ext cx="1234440" cy="283464"/>
+            <a:ext cx="1958645" cy="283464"/>
           </a:xfrm>
           <a:prstGeom prst="rect">
             <a:avLst/>
@@ -13959,7 +13959,7 @@
                 <a:ea typeface="Calibri" pitchFamily="34" charset="-122"/>
                 <a:cs typeface="Calibri" pitchFamily="34" charset="-120"/>
               </a:rPr>
-              <a:t>DUA NARASI</a:t>
+              <a:t>KLAIM DAN BANTAHAN</a:t>
             </a:r>
             <a:endParaRPr lang="en-US" sz="950" dirty="0"/>
           </a:p>
@@ -14040,7 +14040,7 @@
                 <a:ea typeface="Calibri" pitchFamily="34" charset="-122"/>
                 <a:cs typeface="Calibri" pitchFamily="34" charset="-120"/>
               </a:rPr>
-              <a:t>Ethical Oil dan Bantahannya</a:t>
+              <a:t>Klaim Ethical Oil</a:t>
             </a:r>
             <a:pPr indent="0" marL="0">
               <a:lnSpc>
@@ -15363,7 +15363,7 @@
                 <a:ea typeface="Calibri" pitchFamily="34" charset="-122"/>
                 <a:cs typeface="Calibri" pitchFamily="34" charset="-120"/>
               </a:rPr>
-              <a:t>Sembilan Teori, Sembilan Putusan</a:t>
+              <a:t>Matriks Sembilan Teori</a:t>
             </a:r>
             <a:pPr indent="0" marL="0">
               <a:lnSpc>
@@ -17342,7 +17342,7 @@
                 <a:ea typeface="Calibri" pitchFamily="34" charset="-122"/>
                 <a:cs typeface="Calibri" pitchFamily="34" charset="-120"/>
               </a:rPr>
-              <a:t>Peran Teori Etika</a:t>
+              <a:t>Urgensi Teori Etika</a:t>
             </a:r>
             <a:endParaRPr lang="en-US" sz="1400" dirty="0"/>
           </a:p>
@@ -17381,7 +17381,7 @@
                 <a:ea typeface="Calibri" pitchFamily="34" charset="-122"/>
                 <a:cs typeface="Calibri" pitchFamily="34" charset="-120"/>
               </a:rPr>
-              <a:t>Kenapa keputusan bisnis butuh dasar penalaran</a:t>
+              <a:t>Dasar penalaran bagi keputusan bisnis</a:t>
             </a:r>
             <a:endParaRPr lang="en-US" sz="1150" dirty="0"/>
           </a:p>
@@ -17479,7 +17479,7 @@
                 <a:ea typeface="Calibri" pitchFamily="34" charset="-122"/>
                 <a:cs typeface="Calibri" pitchFamily="34" charset="-120"/>
               </a:rPr>
-              <a:t>Tiga Sikap Moral</a:t>
+              <a:t>Tiga Posisi Moral</a:t>
             </a:r>
             <a:endParaRPr lang="en-US" sz="1400" dirty="0"/>
           </a:p>
@@ -17518,7 +17518,7 @@
                 <a:ea typeface="Calibri" pitchFamily="34" charset="-122"/>
                 <a:cs typeface="Calibri" pitchFamily="34" charset="-120"/>
               </a:rPr>
-              <a:t>Absolutism, relativism, dan pluralism</a:t>
+              <a:t>Absolutism, relativism, pluralism</a:t>
             </a:r>
             <a:endParaRPr lang="en-US" sz="1150" dirty="0"/>
           </a:p>
@@ -17616,7 +17616,7 @@
                 <a:ea typeface="Calibri" pitchFamily="34" charset="-122"/>
                 <a:cs typeface="Calibri" pitchFamily="34" charset="-120"/>
               </a:rPr>
-              <a:t>Dua Keluarga Teori</a:t>
+              <a:t>Taksonomi Teori</a:t>
             </a:r>
             <a:endParaRPr lang="en-US" sz="1400" dirty="0"/>
           </a:p>
@@ -17890,7 +17890,7 @@
                 <a:ea typeface="Calibri" pitchFamily="34" charset="-122"/>
                 <a:cs typeface="Calibri" pitchFamily="34" charset="-120"/>
               </a:rPr>
-              <a:t>Menilai dari Akibat</a:t>
+              <a:t>Teori Consequentialist</a:t>
             </a:r>
             <a:endParaRPr lang="en-US" sz="1400" dirty="0"/>
           </a:p>
@@ -18027,7 +18027,7 @@
                 <a:ea typeface="Calibri" pitchFamily="34" charset="-122"/>
                 <a:cs typeface="Calibri" pitchFamily="34" charset="-120"/>
               </a:rPr>
-              <a:t>Menilai dari Prinsip</a:t>
+              <a:t>Teori Principle-based</a:t>
             </a:r>
             <a:endParaRPr lang="en-US" sz="1400" dirty="0"/>
           </a:p>
@@ -18164,7 +18164,7 @@
                 <a:ea typeface="Calibri" pitchFamily="34" charset="-122"/>
                 <a:cs typeface="Calibri" pitchFamily="34" charset="-120"/>
               </a:rPr>
-              <a:t>Enam Kritik</a:t>
+              <a:t>Kritik dan Keterbatasan</a:t>
             </a:r>
             <a:endParaRPr lang="en-US" sz="1400" dirty="0"/>
           </a:p>
@@ -18301,7 +18301,7 @@
                 <a:ea typeface="Calibri" pitchFamily="34" charset="-122"/>
                 <a:cs typeface="Calibri" pitchFamily="34" charset="-120"/>
               </a:rPr>
-              <a:t>Empat Alternatif</a:t>
+              <a:t>Perspektif Alternatif</a:t>
             </a:r>
             <a:endParaRPr lang="en-US" sz="1400" dirty="0"/>
           </a:p>
@@ -18701,7 +18701,7 @@
         <p:spPr>
           <a:xfrm>
             <a:off x="621792" y="457200"/>
-            <a:ext cx="962863" cy="283464"/>
+            <a:ext cx="1143914" cy="283464"/>
           </a:xfrm>
           <a:prstGeom prst="roundRect">
             <a:avLst>
@@ -18728,7 +18728,7 @@
         <p:spPr>
           <a:xfrm>
             <a:off x="621792" y="457200"/>
-            <a:ext cx="962863" cy="283464"/>
+            <a:ext cx="1143914" cy="283464"/>
           </a:xfrm>
           <a:prstGeom prst="rect">
             <a:avLst/>
@@ -18752,7 +18752,7 @@
                 <a:ea typeface="Calibri" pitchFamily="34" charset="-122"/>
                 <a:cs typeface="Calibri" pitchFamily="34" charset="-120"/>
               </a:rPr>
-              <a:t>DISKUSI</a:t>
+              <a:t>PENERAPAN</a:t>
             </a:r>
             <a:endParaRPr lang="en-US" sz="950" dirty="0"/>
           </a:p>
@@ -18766,7 +18766,7 @@
         </p:nvSpPr>
         <p:spPr>
           <a:xfrm>
-            <a:off x="1703527" y="457200"/>
+            <a:off x="1884578" y="457200"/>
             <a:ext cx="1143914" cy="283464"/>
           </a:xfrm>
           <a:prstGeom prst="roundRect">
@@ -18793,7 +18793,7 @@
         </p:nvSpPr>
         <p:spPr>
           <a:xfrm>
-            <a:off x="1703527" y="457200"/>
+            <a:off x="1884578" y="457200"/>
             <a:ext cx="1143914" cy="283464"/>
           </a:xfrm>
           <a:prstGeom prst="rect">
@@ -18899,7 +18899,7 @@
                 <a:ea typeface="Calibri" pitchFamily="34" charset="-122"/>
                 <a:cs typeface="Calibri" pitchFamily="34" charset="-120"/>
               </a:rPr>
-              <a:t>Empat Pertanyaan untuk Kelas</a:t>
+              <a:t>Agenda Diskusi</a:t>
             </a:r>
             <a:pPr indent="0" marL="0">
               <a:lnSpc>
@@ -18958,7 +18958,7 @@
                 <a:ea typeface="Calibri" pitchFamily="34" charset="-122"/>
                 <a:cs typeface="Calibri" pitchFamily="34" charset="-120"/>
               </a:rPr>
-              <a:t>Setiap pertanyaan menguji satu teori pada kasus yang sama.</a:t>
+              <a:t>Empat pertanyaan pemandu, masing-masing menguji satu teori.</a:t>
             </a:r>
             <a:endParaRPr lang="en-US" sz="1350" dirty="0"/>
           </a:p>
@@ -21266,7 +21266,7 @@
                 <a:ea typeface="Calibri" pitchFamily="34" charset="-122"/>
                 <a:cs typeface="Calibri" pitchFamily="34" charset="-120"/>
               </a:rPr>
-              <a:t>Etika Bisnis Butuh Dasar, Bukan Selera</a:t>
+              <a:t>Urgensi Teori Etika Normatif</a:t>
             </a:r>
             <a:pPr indent="0" marL="0">
               <a:lnSpc>
@@ -21450,7 +21450,7 @@
                 <a:ea typeface="Calibri" pitchFamily="34" charset="-122"/>
                 <a:cs typeface="Calibri" pitchFamily="34" charset="-120"/>
               </a:rPr>
-              <a:t>Konteksnya Lebih Rumit</a:t>
+              <a:t>Kompleksitas Konteks</a:t>
             </a:r>
             <a:endParaRPr lang="en-US" sz="1400" dirty="0"/>
           </a:p>
@@ -21617,7 +21617,7 @@
                 <a:ea typeface="Calibri" pitchFamily="34" charset="-122"/>
                 <a:cs typeface="Calibri" pitchFamily="34" charset="-120"/>
               </a:rPr>
-              <a:t>Keputusan Harus Dibela</a:t>
+              <a:t>Kewajiban Justifikasi</a:t>
             </a:r>
             <a:endParaRPr lang="en-US" sz="1400" dirty="0"/>
           </a:p>
@@ -21784,7 +21784,7 @@
                 <a:ea typeface="Calibri" pitchFamily="34" charset="-122"/>
                 <a:cs typeface="Calibri" pitchFamily="34" charset="-120"/>
               </a:rPr>
-              <a:t>Kritik Juga Butuh Dasar</a:t>
+              <a:t>Kritik Menuntut Landasan</a:t>
             </a:r>
             <a:endParaRPr lang="en-US" sz="1400" dirty="0"/>
           </a:p>
@@ -22214,7 +22214,7 @@
                 <a:ea typeface="Calibri" pitchFamily="34" charset="-122"/>
                 <a:cs typeface="Calibri" pitchFamily="34" charset="-120"/>
               </a:rPr>
-              <a:t>Tiga Sikap terhadap Kebenaran Moral</a:t>
+              <a:t>Absolutism, Relativism, Pluralism</a:t>
             </a:r>
             <a:pPr indent="0" marL="0">
               <a:lnSpc>
@@ -23226,7 +23226,7 @@
                 <a:ea typeface="Calibri" pitchFamily="34" charset="-122"/>
                 <a:cs typeface="Calibri" pitchFamily="34" charset="-120"/>
               </a:rPr>
-              <a:t>Dua Keluarga Besar Teori Barat Modern</a:t>
+              <a:t>Taksonomi Teori Barat Modern</a:t>
             </a:r>
             <a:pPr indent="0" marL="0">
               <a:lnSpc>
@@ -24108,7 +24108,7 @@
         <p:spPr>
           <a:xfrm>
             <a:off x="621792" y="457200"/>
-            <a:ext cx="1506017" cy="283464"/>
+            <a:ext cx="1596542" cy="283464"/>
           </a:xfrm>
           <a:prstGeom prst="roundRect">
             <a:avLst>
@@ -24135,7 +24135,7 @@
         <p:spPr>
           <a:xfrm>
             <a:off x="621792" y="457200"/>
-            <a:ext cx="1506017" cy="283464"/>
+            <a:ext cx="1596542" cy="283464"/>
           </a:xfrm>
           <a:prstGeom prst="rect">
             <a:avLst/>
@@ -24159,7 +24159,7 @@
                 <a:ea typeface="Calibri" pitchFamily="34" charset="-122"/>
                 <a:cs typeface="Calibri" pitchFamily="34" charset="-120"/>
               </a:rPr>
-              <a:t>KASUS PENGUJI</a:t>
+              <a:t>PRODUCING TOYS</a:t>
             </a:r>
             <a:endParaRPr lang="en-US" sz="950" dirty="0"/>
           </a:p>
@@ -24173,7 +24173,7 @@
         </p:nvSpPr>
         <p:spPr>
           <a:xfrm>
-            <a:off x="2246681" y="457200"/>
+            <a:off x="2337206" y="457200"/>
             <a:ext cx="1234440" cy="283464"/>
           </a:xfrm>
           <a:prstGeom prst="roundRect">
@@ -24200,7 +24200,7 @@
         </p:nvSpPr>
         <p:spPr>
           <a:xfrm>
-            <a:off x="2246681" y="457200"/>
+            <a:off x="2337206" y="457200"/>
             <a:ext cx="1234440" cy="283464"/>
           </a:xfrm>
           <a:prstGeom prst="rect">
@@ -24306,7 +24306,7 @@
                 <a:ea typeface="Calibri" pitchFamily="34" charset="-122"/>
                 <a:cs typeface="Calibri" pitchFamily="34" charset="-120"/>
               </a:rPr>
-              <a:t>Ethical Dilemma 3: Producing Toys</a:t>
+              <a:t>Ethical Dilemma 3</a:t>
             </a:r>
             <a:pPr indent="0" marL="0">
               <a:lnSpc>
@@ -25487,7 +25487,7 @@
                 <a:ea typeface="Calibri" pitchFamily="34" charset="-122"/>
                 <a:cs typeface="Calibri" pitchFamily="34" charset="-120"/>
               </a:rPr>
-              <a:t>Bukan Serakah Sesaat</a:t>
+              <a:t>Horizon Jangka Panjang</a:t>
             </a:r>
             <a:endParaRPr lang="en-US" sz="1400" dirty="0"/>
           </a:p>
@@ -25654,7 +25654,7 @@
                 <a:ea typeface="Calibri" pitchFamily="34" charset="-122"/>
                 <a:cs typeface="Calibri" pitchFamily="34" charset="-120"/>
               </a:rPr>
-              <a:t>Batasnya: Market Failure</a:t>
+              <a:t>Batas: Market Failure</a:t>
             </a:r>
             <a:endParaRPr lang="en-US" sz="1400" dirty="0"/>
           </a:p>
@@ -26991,7 +26991,7 @@
         <p:spPr>
           <a:xfrm>
             <a:off x="1794053" y="457200"/>
-            <a:ext cx="1415491" cy="283464"/>
+            <a:ext cx="1687068" cy="283464"/>
           </a:xfrm>
           <a:prstGeom prst="roundRect">
             <a:avLst>
@@ -27018,7 +27018,7 @@
         <p:spPr>
           <a:xfrm>
             <a:off x="1794053" y="457200"/>
-            <a:ext cx="1415491" cy="283464"/>
+            <a:ext cx="1687068" cy="283464"/>
           </a:xfrm>
           <a:prstGeom prst="rect">
             <a:avLst/>
@@ -27042,7 +27042,7 @@
                 <a:ea typeface="Calibri" pitchFamily="34" charset="-122"/>
                 <a:cs typeface="Calibri" pitchFamily="34" charset="-120"/>
               </a:rPr>
-              <a:t>KETERBATASAN</a:t>
+              <a:t>KRITIK INTERNAL</a:t>
             </a:r>
             <a:endParaRPr lang="en-US" sz="950" dirty="0"/>
           </a:p>
@@ -27123,7 +27123,7 @@
                 <a:ea typeface="Calibri" pitchFamily="34" charset="-122"/>
                 <a:cs typeface="Calibri" pitchFamily="34" charset="-120"/>
               </a:rPr>
-              <a:t>Empat Masalah, Lalu Dua Jenis</a:t>
+              <a:t>Keterbatasan Utilitarianism</a:t>
             </a:r>
             <a:pPr indent="0" marL="0">
               <a:lnSpc>
@@ -27182,7 +27182,7 @@
                 <a:ea typeface="Calibri" pitchFamily="34" charset="-122"/>
                 <a:cs typeface="Calibri" pitchFamily="34" charset="-120"/>
               </a:rPr>
-              <a:t>Penyempurnaan Mill memecah utilitarianism menjadi dua cara menilai yang berlawanan.</a:t>
+              <a:t>Empat masalah pokok, lalu penyempurnaan Mill menjadi dua jenis penilaian.</a:t>
             </a:r>
             <a:endParaRPr lang="en-US" sz="1350" dirty="0"/>
           </a:p>

--- a/business-ethics/chapter-3/decks/Deck-1-Evaluating-Business-Ethics.pptx
+++ b/business-ethics/chapter-3/decks/Deck-1-Evaluating-Business-Ethics.pptx
@@ -3881,7 +3881,7 @@
                 <a:ea typeface="Calibri" pitchFamily="34" charset="-122"/>
                 <a:cs typeface="Calibri" pitchFamily="34" charset="-120"/>
               </a:rPr>
-              <a:t>Pembahasan Materi &amp; Kasus —</a:t>
+              <a:t>Pembahasan Materi dan Kasus —</a:t>
             </a:r>
             <a:endParaRPr lang="en-US" sz="1600" dirty="0"/>
           </a:p>
@@ -4002,7 +4002,7 @@
                 <a:ea typeface="Calibri" pitchFamily="34" charset="-122"/>
                 <a:cs typeface="Calibri" pitchFamily="34" charset="-120"/>
               </a:rPr>
-              <a:t>Sembilan teori etika normatif dan bagaimana kesembilannya membaca satu kasus yang sama: Canada’s Oil Sands.</a:t>
+              <a:t>Sembilan teori etika normatif dan penerapannya pada satu kasus: Canada’s Oil Sands.</a:t>
             </a:r>
             <a:endParaRPr lang="en-US" sz="1400" dirty="0"/>
           </a:p>
@@ -4694,7 +4694,7 @@
                 <a:ea typeface="Calibri" pitchFamily="34" charset="-122"/>
                 <a:cs typeface="Calibri" pitchFamily="34" charset="-120"/>
               </a:rPr>
-              <a:t>Terima sebuah hukum moral hanya bila semua makhluk rasional dapat menerimanya. Anda tidak menghendaki prinsip mempekerjakan anak berlaku pada keluarga Anda sendiri.</a:t>
+              <a:t>Hukum moral sah hanya bila seluruh makhluk rasional dapat menerimanya. Prinsip mempekerjakan anak tidak dikehendaki berlaku universal.</a:t>
             </a:r>
             <a:endParaRPr lang="en-US" sz="1150" dirty="0"/>
           </a:p>
@@ -4861,7 +4861,7 @@
                 <a:ea typeface="Calibri" pitchFamily="34" charset="-122"/>
                 <a:cs typeface="Calibri" pitchFamily="34" charset="-120"/>
               </a:rPr>
-              <a:t>Perlakukan kemanusiaan sebagai tujuan, tidak pernah hanya sebagai sarana. Anak-anak itu diperlakukan semata sebagai tenaga kerja murah.</a:t>
+              <a:t>Kemanusiaan diperlakukan sebagai tujuan, tidak semata sebagai sarana. Pekerja anak direduksi menjadi faktor biaya.</a:t>
             </a:r>
             <a:endParaRPr lang="en-US" sz="1150" dirty="0"/>
           </a:p>
@@ -4984,7 +4984,7 @@
                 <a:ea typeface="Calibri" pitchFamily="34" charset="-122"/>
                 <a:cs typeface="Calibri" pitchFamily="34" charset="-120"/>
               </a:rPr>
-              <a:t>Menaikkan upah karena kasihan dinilai tidak bermoral, karena menalar kewajiban dinilai bermoral.</a:t>
+              <a:t>Motif belas kasih tidak bernilai moral, motif penalaran kewajiban bernilai moral.</a:t>
             </a:r>
             <a:endParaRPr lang="en-US" sz="1050" dirty="0"/>
           </a:p>
@@ -5107,7 +5107,7 @@
                 <a:ea typeface="Calibri" pitchFamily="34" charset="-122"/>
                 <a:cs typeface="Calibri" pitchFamily="34" charset="-120"/>
               </a:rPr>
-              <a:t>Tidak ada ruang ketika sedikit pelenturan aturan menghasilkan hasil yang jauh lebih baik.</a:t>
+              <a:t>Tidak tersedia ruang bagi pengecualian yang menghasilkan akibat lebih baik.</a:t>
             </a:r>
             <a:endParaRPr lang="en-US" sz="1050" dirty="0"/>
           </a:p>
@@ -5230,7 +5230,7 @@
                 <a:ea typeface="Calibri" pitchFamily="34" charset="-122"/>
                 <a:cs typeface="Calibri" pitchFamily="34" charset="-120"/>
               </a:rPr>
-              <a:t>Manusia yang selalu menalar kewajibannya lebih merupakan ideal daripada realitas.</a:t>
+              <a:t>Rasionalitas moral yang konsisten merupakan ideal, bukan deskripsi realitas.</a:t>
             </a:r>
             <a:endParaRPr lang="en-US" sz="1050" dirty="0"/>
           </a:p>
@@ -5294,7 +5294,7 @@
                 <a:ea typeface="Calibri" pitchFamily="34" charset="-122"/>
                 <a:cs typeface="Calibri" pitchFamily="34" charset="-120"/>
               </a:rPr>
-              <a:t>Kant mendasari stakeholder theory: martabatnya yang jadi alasan etis, bukan manfaat ekonominya.</a:t>
+              <a:t>Kant menjadi dasar stakeholder theory: martabat sebagai alasan etis, bukan manfaat ekonomi.</a:t>
             </a:r>
             <a:endParaRPr lang="en-US" sz="1300" dirty="0"/>
           </a:p>
@@ -5911,7 +5911,7 @@
                 <a:ea typeface="Calibri" pitchFamily="34" charset="-122"/>
                 <a:cs typeface="Calibri" pitchFamily="34" charset="-120"/>
               </a:rPr>
-              <a:t>Tanggung jawab perusahaan menghormati hak asasi lewat seluruh relasi bisnisnya.</a:t>
+              <a:t>Tanggung jawab korporasi menghormati hak asasi pada seluruh relasi bisnisnya.</a:t>
             </a:r>
             <a:endParaRPr lang="en-US" sz="1150" dirty="0"/>
           </a:p>
@@ -6462,7 +6462,7 @@
                 <a:ea typeface="Calibri" pitchFamily="34" charset="-122"/>
                 <a:cs typeface="Calibri" pitchFamily="34" charset="-120"/>
               </a:rPr>
-              <a:t>Kebebasan berkumpul dan berserikat, dasar hukum serikat pekerja</a:t>
+              <a:t>Kebebasan berkumpul dan berserikat, landasan hukum serikat pekerja</a:t>
             </a:r>
             <a:endParaRPr lang="en-US" sz="1100" dirty="0"/>
           </a:p>
@@ -6992,7 +6992,7 @@
                 <a:ea typeface="Calibri" pitchFamily="34" charset="-122"/>
                 <a:cs typeface="Calibri" pitchFamily="34" charset="-120"/>
               </a:rPr>
-              <a:t>Aturan apa yang akan Anda pilih bila Anda tidak tahu akan terlahir sebagai siapa di dalam masyarakat itu?</a:t>
+              <a:t>Prinsip keadilan adalah prinsip yang dipilih pihak rasional tanpa mengetahui posisi sosial yang akan ditempatinya.</a:t>
             </a:r>
             <a:endParaRPr lang="en-US" sz="1250" dirty="0"/>
           </a:p>
@@ -7098,7 +7098,7 @@
                 <a:ea typeface="Calibri" pitchFamily="34" charset="-122"/>
                 <a:cs typeface="Calibri" pitchFamily="34" charset="-120"/>
               </a:rPr>
-              <a:t>Bayangkan orang yang setara, bebas, dan rasional, namun tidak tahu peran apa yang akan mereka tempati. Mereka bisa menjadi petugas kebersihan, seorang ratu, pengidap penyakit terminal, orang kaya, atau orang miskin.</a:t>
+              <a:t>Pihak yang setara, bebas, dan rasional memilih prinsip tanpa mengetahui posisi yang akan ditempatinya: petugas kebersihan, kepala negara, pengidap penyakit terminal, atau warga miskin.</a:t>
             </a:r>
             <a:endParaRPr lang="en-US" sz="1150" dirty="0"/>
           </a:p>
@@ -7127,7 +7127,7 @@
                 <a:ea typeface="Calibri" pitchFamily="34" charset="-122"/>
                 <a:cs typeface="Calibri" pitchFamily="34" charset="-120"/>
               </a:rPr>
-              <a:t>Ketidaktahuan itulah yang memaksa mereka bersikap adil.</a:t>
+              <a:t>Ketidaktahuan inilah yang menghasilkan imparsialitas.</a:t>
             </a:r>
             <a:endParaRPr lang="en-US" sz="1150" dirty="0"/>
           </a:p>
@@ -7311,7 +7311,7 @@
                 <a:ea typeface="Calibri" pitchFamily="34" charset="-122"/>
                 <a:cs typeface="Calibri" pitchFamily="34" charset="-120"/>
               </a:rPr>
-              <a:t>Setiap orang memiliki hak setara atas sistem kebebasan dasar terluas yang kompatibel untuk semua.</a:t>
+              <a:t>Setiap orang berhak setara atas sistem kebebasan dasar terluas yang kompatibel bagi semua.</a:t>
             </a:r>
             <a:endParaRPr lang="en-US" sz="1050" dirty="0"/>
           </a:p>
@@ -7434,7 +7434,7 @@
                 <a:ea typeface="Calibri" pitchFamily="34" charset="-122"/>
                 <a:cs typeface="Calibri" pitchFamily="34" charset="-120"/>
               </a:rPr>
-              <a:t>Ketimpangan hanya sah bila memberi manfaat terbesar bagi pihak yang paling tidak beruntung.</a:t>
+              <a:t>Ketimpangan sah hanya bila memberi manfaat terbesar bagi pihak paling tidak beruntung.</a:t>
             </a:r>
             <a:endParaRPr lang="en-US" sz="1050" dirty="0"/>
           </a:p>
@@ -7498,7 +7498,7 @@
                 <a:ea typeface="Calibri" pitchFamily="34" charset="-122"/>
                 <a:cs typeface="Calibri" pitchFamily="34" charset="-120"/>
               </a:rPr>
-              <a:t>Kriteria pertama didahulukan. Kebebasan dasar harus terwujud sama rata sebelum ketimpangan apa pun boleh dibenarkan. Inilah alat paling tajam untuk membedah kasus oil sands nanti.</a:t>
+              <a:t>Kriteria pertama bersifat leksikal: kebebasan dasar harus terwujud merata sebelum ketimpangan dibenarkan. Kriteria inilah yang paling menentukan pada kasus oil sands.</a:t>
             </a:r>
             <a:endParaRPr lang="en-US" sz="1300" dirty="0"/>
           </a:p>
@@ -8186,7 +8186,7 @@
                 <a:ea typeface="Calibri" pitchFamily="34" charset="-122"/>
                 <a:cs typeface="Calibri" pitchFamily="34" charset="-120"/>
               </a:rPr>
-              <a:t>Setiap teori memaksa memilih satu aspek moralitas, padahal seluruhnya penting.</a:t>
+              <a:t>Setiap teori memaksa pemilihan satu aspek moralitas, padahal seluruhnya relevan.</a:t>
             </a:r>
             <a:endParaRPr lang="en-US" sz="1100" dirty="0"/>
           </a:p>
@@ -8998,7 +8998,7 @@
                 <a:ea typeface="Calibri" pitchFamily="34" charset="-122"/>
                 <a:cs typeface="Calibri" pitchFamily="34" charset="-120"/>
               </a:rPr>
-              <a:t>Tidak ada alasan mengasumsikan teori Barat cocok untuk seluruh dunia.</a:t>
+              <a:t>Tidak terdapat dasar untuk mengasumsikan universalitas teori Barat.</a:t>
             </a:r>
             <a:endParaRPr lang="en-US" sz="1100" dirty="0"/>
           </a:p>
@@ -9489,7 +9489,7 @@
                 <a:ea typeface="Calibri" pitchFamily="34" charset="-122"/>
                 <a:cs typeface="Calibri" pitchFamily="34" charset="-120"/>
               </a:rPr>
-              <a:t>Fokus penilaian berpindah dari tindakan kepada pelakunya. Tindakan yang baik berasal dari orang yang baik.</a:t>
+              <a:t>Fokus penilaian bergeser dari tindakan ke pelakunya. Tindakan baik bersumber dari karakter yang baik.</a:t>
             </a:r>
             <a:endParaRPr lang="en-US" sz="1150" dirty="0"/>
           </a:p>
@@ -9901,7 +9901,7 @@
                 <a:ea typeface="Calibri" pitchFamily="34" charset="-122"/>
                 <a:cs typeface="Calibri" pitchFamily="34" charset="-120"/>
               </a:rPr>
-              <a:t>Norma dihasilkan lewat dialog terbuka. Keputusan benar bila dicapai lewat cara yang benar.</a:t>
+              <a:t>Norma dihasilkan melalui deliberasi terbuka. Keputusan sah bila prosedurnya sah.</a:t>
             </a:r>
             <a:endParaRPr lang="en-US" sz="1150" dirty="0"/>
           </a:p>
@@ -10107,7 +10107,7 @@
                 <a:ea typeface="Calibri" pitchFamily="34" charset="-122"/>
                 <a:cs typeface="Calibri" pitchFamily="34" charset="-120"/>
               </a:rPr>
-              <a:t>Moralitas terletak pada perasaan spontan terhadap orang lain, di luar wilayah rasionalitas.</a:t>
+              <a:t>Moralitas berlandas dorongan spontan terhadap sesama, di luar wilayah rasionalitas.</a:t>
             </a:r>
             <a:endParaRPr lang="en-US" sz="1150" dirty="0"/>
           </a:p>
@@ -10210,7 +10210,7 @@
                 <a:ea typeface="Calibri" pitchFamily="34" charset="-122"/>
                 <a:cs typeface="Calibri" pitchFamily="34" charset="-120"/>
               </a:rPr>
-              <a:t>Keempatnya menuntut hal yang tidak diminta teori Barat modern: melihat siapa yang memutuskan, dalam relasi apa, dan lewat proses seperti apa keputusan itu lahir.</a:t>
+              <a:t>Keempatnya menambahkan variabel yang diabaikan teori Barat modern: identitas pengambil keputusan, relasi, dan prosedur.</a:t>
             </a:r>
             <a:endParaRPr lang="en-US" sz="1300" dirty="0"/>
           </a:p>
@@ -10534,7 +10534,7 @@
                 <a:ea typeface="Calibri" pitchFamily="34" charset="-122"/>
                 <a:cs typeface="Calibri" pitchFamily="34" charset="-120"/>
               </a:rPr>
-              <a:t>Buku ini tidak menyarankan satu teori sebagai pandangan yang paling benar.</a:t>
+              <a:t>Crane et al. (2019) tidak menetapkan satu teori sebagai yang paling sahih.</a:t>
             </a:r>
             <a:endParaRPr lang="en-US" sz="1350" dirty="0"/>
           </a:p>
@@ -10681,7 +10681,7 @@
                 <a:ea typeface="Calibri" pitchFamily="34" charset="-122"/>
                 <a:cs typeface="Calibri" pitchFamily="34" charset="-120"/>
               </a:rPr>
-              <a:t>Dilema etis dipusatkan menjadi satu pertimbangan normatif tunggal. Keputusan terlihat rapi, tetapi seluruh pertimbangan lain hilang dari pandangan.</a:t>
+              <a:t>Dilema direduksi menjadi satu pertimbangan normatif. Kesimpulannya tegas, namun pertimbangan lain tidak terlihat.</a:t>
             </a:r>
             <a:endParaRPr lang="en-US" sz="1250" dirty="0"/>
           </a:p>
@@ -10740,7 +10740,7 @@
                 <a:ea typeface="Calibri" pitchFamily="34" charset="-122"/>
                 <a:cs typeface="Calibri" pitchFamily="34" charset="-120"/>
               </a:rPr>
-              <a:t>satu berkas cahaya, satu jawaban</a:t>
+              <a:t>reduksi menjadi satu kesimpulan</a:t>
             </a:r>
             <a:endParaRPr lang="en-US" sz="1100" dirty="0"/>
           </a:p>
@@ -10882,7 +10882,7 @@
                 <a:ea typeface="Calibri" pitchFamily="34" charset="-122"/>
                 <a:cs typeface="Calibri" pitchFamily="34" charset="-120"/>
               </a:rPr>
-              <a:t>Dilema yang sama dipecah menjadi spektrum pertimbangan. Setiap teori menyinari sisi yang tidak terlihat oleh teori lainnya.</a:t>
+              <a:t>Dilema yang sama diuraikan menjadi spektrum pertimbangan. Setiap teori menyoroti dimensi yang luput dari teori lain.</a:t>
             </a:r>
             <a:endParaRPr lang="en-US" sz="1250" dirty="0"/>
           </a:p>
@@ -11101,7 +11101,7 @@
                 <a:ea typeface="Calibri" pitchFamily="34" charset="-122"/>
                 <a:cs typeface="Calibri" pitchFamily="34" charset="-120"/>
               </a:rPr>
-              <a:t>satu kasus, sembilan sorotan</a:t>
+              <a:t>spektrum sembilan pertimbangan</a:t>
             </a:r>
             <a:endParaRPr lang="en-US" sz="1100" dirty="0"/>
           </a:p>
@@ -11165,7 +11165,7 @@
                 <a:ea typeface="Calibri" pitchFamily="34" charset="-122"/>
                 <a:cs typeface="Calibri" pitchFamily="34" charset="-120"/>
               </a:rPr>
-              <a:t>Keputusan yang baik bukan keputusan yang menemukan teori paling benar, melainkan keputusan yang menyadari seluruh spektrum itu dan dapat dipertanggungjawabkan kepada semua pihak yang terdampak.</a:t>
+              <a:t>Keputusan yang baik bukan yang menemukan teori paling sahih, melainkan yang menyadari seluruh spektrum pertimbangan dan dapat dipertanggungjawabkan kepada pihak terdampak.</a:t>
             </a:r>
             <a:endParaRPr lang="en-US" sz="1300" dirty="0"/>
           </a:p>
@@ -12449,7 +12449,7 @@
                 <a:ea typeface="Calibri" pitchFamily="34" charset="-122"/>
                 <a:cs typeface="Calibri" pitchFamily="34" charset="-120"/>
               </a:rPr>
-              <a:t>Most Destructive Project on Earth atau Ethical Oil? Perdebatannya berlangsung puluhan tahun tanpa kesimpulan yang konklusif.</a:t>
+              <a:t>Most Destructive Project on Earth atau Ethical Oil? Perdebatan berlangsung dua dekade tanpa kesimpulan konklusif.</a:t>
             </a:r>
             <a:endParaRPr lang="en-US" sz="1500" dirty="0"/>
           </a:p>
@@ -13145,7 +13145,7 @@
                 <a:ea typeface="Calibri" pitchFamily="34" charset="-122"/>
                 <a:cs typeface="Calibri" pitchFamily="34" charset="-120"/>
               </a:rPr>
-              <a:t>Kontribusi ke ekonomi Kanada sepanjang 2017 sampai 2027</a:t>
+              <a:t>Kontribusi terhadap perekonomian Kanada, 2017 sampai 2027</a:t>
             </a:r>
             <a:endParaRPr lang="en-US" sz="1100" dirty="0"/>
           </a:p>
@@ -13379,7 +13379,7 @@
                 <a:ea typeface="Calibri" pitchFamily="34" charset="-122"/>
                 <a:cs typeface="Calibri" pitchFamily="34" charset="-120"/>
               </a:rPr>
-              <a:t>Jejak tambang aktif yang sudah direklamasi sampai hari ini</a:t>
+              <a:t>Jejak tambang aktif yang telah direklamasi</a:t>
             </a:r>
             <a:endParaRPr lang="en-US" sz="1100" dirty="0"/>
           </a:p>
@@ -13775,7 +13775,7 @@
                 <a:ea typeface="Calibri" pitchFamily="34" charset="-122"/>
                 <a:cs typeface="Calibri" pitchFamily="34" charset="-120"/>
               </a:rPr>
-              <a:t>Kedua sisi memakai data resmi. Perbedaannya bukan pada fakta, melainkan pada apa yang layak dihitung.</a:t>
+              <a:t>Kedua sisi merujuk data resmi. Perbedaannya pada kriteria apa yang layak diperhitungkan.</a:t>
             </a:r>
             <a:endParaRPr lang="en-US" sz="1200" dirty="0"/>
           </a:p>
@@ -14226,7 +14226,7 @@
                 <a:ea typeface="Calibri" pitchFamily="34" charset="-122"/>
                 <a:cs typeface="Calibri" pitchFamily="34" charset="-120"/>
               </a:rPr>
-              <a:t>Ezra Levant: membeli minyak Kanada lebih bertanggung jawab karena diatur demokratis dan tidak korup.</a:t>
+              <a:t>Levant: konsumsi minyak Kanada lebih bertanggung jawab karena tata kelolanya demokratis dan bebas korupsi.</a:t>
             </a:r>
             <a:endParaRPr lang="en-US" sz="1250" dirty="0"/>
           </a:p>
@@ -14788,7 +14788,7 @@
                 <a:ea typeface="Calibri" pitchFamily="34" charset="-122"/>
                 <a:cs typeface="Calibri" pitchFamily="34" charset="-120"/>
               </a:rPr>
-              <a:t>Fakta bahwa negara lain lebih buruk tidak relevan. Kanada dapat menangani oil sands miliknya dan tidak melakukannya.</a:t>
+              <a:t>Keburukan negara lain tidak relevan. Kanada memiliki kapasitas mengatur oil sands miliknya dan tidak melakukannya.</a:t>
             </a:r>
             <a:endParaRPr lang="en-US" sz="1050" dirty="0"/>
           </a:p>
@@ -14911,7 +14911,7 @@
                 <a:ea typeface="Calibri" pitchFamily="34" charset="-122"/>
                 <a:cs typeface="Calibri" pitchFamily="34" charset="-120"/>
               </a:rPr>
-              <a:t>Di dunia saat ini seluruh bahan bakar fosil tidak etis. Tidak ada yang namanya minyak yang etis.</a:t>
+              <a:t>Seluruh bahan bakar fosil tidak etis pada kondisi saat ini. Kategori minyak yang etis tidak eksis.</a:t>
             </a:r>
             <a:endParaRPr lang="en-US" sz="1050" dirty="0"/>
           </a:p>
@@ -15034,7 +15034,7 @@
                 <a:ea typeface="Calibri" pitchFamily="34" charset="-122"/>
                 <a:cs typeface="Calibri" pitchFamily="34" charset="-120"/>
               </a:rPr>
-              <a:t>Ethicaloil.org diyakini memperoleh dana dari industri minyak dan disebut kelompok kedok.</a:t>
+              <a:t>Ethicaloil.org diindikasikan memperoleh pendanaan industri dan berfungsi sebagai organisasi kedok.</a:t>
             </a:r>
             <a:endParaRPr lang="en-US" sz="1050" dirty="0"/>
           </a:p>
@@ -15098,7 +15098,7 @@
                 <a:ea typeface="Calibri" pitchFamily="34" charset="-122"/>
                 <a:cs typeface="Calibri" pitchFamily="34" charset="-120"/>
               </a:rPr>
-              <a:t>Klaim ethical oil membandingkan diri dengan negara terburuk. Itu perbandingan ke bawah, bukan argumen moral.</a:t>
+              <a:t>Klaim ethical oil berpijak pada perbandingan dengan produsen terburuk. Konstruksi ini bersifat relatif, bukan normatif.</a:t>
             </a:r>
             <a:endParaRPr lang="en-US" sz="1300" dirty="0"/>
           </a:p>
@@ -15500,7 +15500,7 @@
                 <a:ea typeface="Calibri" pitchFamily="34" charset="-122"/>
                 <a:cs typeface="Calibri" pitchFamily="34" charset="-120"/>
               </a:rPr>
-              <a:t>Generasi mendatang tidak hadir di pasar, jadi biayanya tidak pernah masuk harga</a:t>
+              <a:t>Generasi mendatang absen dari pasar sehingga biayanya tidak terinternalisasi</a:t>
             </a:r>
             <a:endParaRPr lang="en-US" sz="1100" dirty="0"/>
           </a:p>
@@ -16295,7 +16295,7 @@
                 <a:ea typeface="Calibri" pitchFamily="34" charset="-122"/>
                 <a:cs typeface="Calibri" pitchFamily="34" charset="-120"/>
               </a:rPr>
-              <a:t>Mengukur diri terhadap negara terburuk adalah perbandingan ke bawah</a:t>
+              <a:t>Pengukuran diri terhadap produsen terburuk merupakan standar terendah</a:t>
             </a:r>
             <a:endParaRPr lang="en-US" sz="1100" dirty="0"/>
           </a:p>
@@ -16772,7 +16772,7 @@
                 <a:ea typeface="Calibri" pitchFamily="34" charset="-122"/>
                 <a:cs typeface="Calibri" pitchFamily="34" charset="-120"/>
               </a:rPr>
-              <a:t>Perebutan istilah oil sands dan tar sands menunjukkan bahasa membentuk moralitas</a:t>
+              <a:t>Perebutan istilah oil sands dan tar sands menunjukkan bahasa membentuk penilaian moral</a:t>
             </a:r>
             <a:endParaRPr lang="en-US" sz="1100" dirty="0"/>
           </a:p>
@@ -16850,7 +16850,7 @@
                 <a:ea typeface="Calibri" pitchFamily="34" charset="-122"/>
                 <a:cs typeface="Calibri" pitchFamily="34" charset="-120"/>
               </a:rPr>
-              <a:t>Tidak satu pun kolom kanan berbunyi mendukung tanpa syarat, namun kolom itu juga tidak seragam. Perbedaan itulah bahan diskusinya.</a:t>
+              <a:t>Tidak satu pun putusan berbunyi mendukung tanpa syarat, namun kesembilannya juga tidak seragam.</a:t>
             </a:r>
             <a:endParaRPr lang="en-US" sz="1150" dirty="0"/>
           </a:p>
@@ -17792,7 +17792,7 @@
                 <a:ea typeface="Calibri" pitchFamily="34" charset="-122"/>
                 <a:cs typeface="Calibri" pitchFamily="34" charset="-120"/>
               </a:rPr>
-              <a:t>Kasus penguji yang dipakai sepanjang bab</a:t>
+              <a:t>Kasus penguji sepanjang bab</a:t>
             </a:r>
             <a:endParaRPr lang="en-US" sz="1150" dirty="0"/>
           </a:p>
@@ -18614,7 +18614,7 @@
                 <a:ea typeface="Calibri" pitchFamily="34" charset="-122"/>
                 <a:cs typeface="Calibri" pitchFamily="34" charset="-120"/>
               </a:rPr>
-              <a:t>Sembilan teori diuji pada satu kasus</a:t>
+              <a:t>Penerapan sembilan teori pada satu kasus</a:t>
             </a:r>
             <a:endParaRPr lang="en-US" sz="1150" dirty="0"/>
           </a:p>
@@ -19120,7 +19120,7 @@
                 <a:ea typeface="Calibri" pitchFamily="34" charset="-122"/>
                 <a:cs typeface="Calibri" pitchFamily="34" charset="-120"/>
               </a:rPr>
-              <a:t>Bila prinsip Kanada diterapkan oleh seluruh negara pemilik cadangan terbesar, apa yang tersisa dari target Paris?</a:t>
+              <a:t>Apa yang tersisa dari target Paris bila prinsip Kanada diterapkan seluruh pemilik cadangan terbesar?</a:t>
             </a:r>
             <a:endParaRPr lang="en-US" sz="1100" dirty="0"/>
           </a:p>
@@ -19282,7 +19282,7 @@
                 <a:ea typeface="Calibri" pitchFamily="34" charset="-122"/>
                 <a:cs typeface="Calibri" pitchFamily="34" charset="-120"/>
               </a:rPr>
-              <a:t>Aturan apa yang Anda pilih bila tidak tahu akan terlahir sebagai pekerja tambang, warga adat hilir, atau anak yang lahir 2060?</a:t>
+              <a:t>Prinsip apa yang dipilih tanpa mengetahui posisi sebagai pekerja tambang, warga adat hilir, atau generasi 2060?</a:t>
             </a:r>
             <a:endParaRPr lang="en-US" sz="1100" dirty="0"/>
           </a:p>
@@ -19444,7 +19444,7 @@
                 <a:ea typeface="Calibri" pitchFamily="34" charset="-122"/>
                 <a:cs typeface="Calibri" pitchFamily="34" charset="-120"/>
               </a:rPr>
-              <a:t>Apakah pernyataan bahwa pihak lain lebih buruk merupakan argumen moral atau sekadar pengalihan perhatian?</a:t>
+              <a:t>Apakah argumen keburukan komparatif memiliki daya normatif?</a:t>
             </a:r>
             <a:endParaRPr lang="en-US" sz="1100" dirty="0"/>
           </a:p>
@@ -19606,7 +19606,7 @@
                 <a:ea typeface="Calibri" pitchFamily="34" charset="-122"/>
                 <a:cs typeface="Calibri" pitchFamily="34" charset="-120"/>
               </a:rPr>
-              <a:t>Siapa yang diuntungkan ketika istilah oil sands atau tar sands yang dipakai untuk menyebut hal yang sama?</a:t>
+              <a:t>Kepentingan siapa yang dilayani oleh pemilihan istilah oil sands atau tar sands?</a:t>
             </a:r>
             <a:endParaRPr lang="en-US" sz="1100" dirty="0"/>
           </a:p>
@@ -19670,7 +19670,7 @@
                 <a:ea typeface="Calibri" pitchFamily="34" charset="-122"/>
                 <a:cs typeface="Calibri" pitchFamily="34" charset="-120"/>
               </a:rPr>
-              <a:t>Simulasi discourse ethics: enam kelompok, dua menit per posisi, lalu satu norma bersama.</a:t>
+              <a:t>Simulasi discourse ethics: enam kelompok, dua menit per posisi, diakhiri perumusan norma bersama.</a:t>
             </a:r>
             <a:endParaRPr lang="en-US" sz="1250" dirty="0"/>
           </a:p>
@@ -20783,7 +20783,7 @@
                 <a:ea typeface="Calibri" pitchFamily="34" charset="-122"/>
                 <a:cs typeface="Calibri" pitchFamily="34" charset="-120"/>
               </a:rPr>
-              <a:t>Setelah sembilan teori, kita tetap tidak memiliki satu jawaban. Buku ini memang tidak menjanjikannya, dan itulah pesan Figure 3.2.</a:t>
+              <a:t>Kesembilan teori tidak menghasilkan satu jawaban tunggal. Ketiadaan jawaban tunggal itulah pesan Figure 3.2.</a:t>
             </a:r>
             <a:endParaRPr lang="en-US" sz="1500" dirty="0"/>
           </a:p>
@@ -21325,7 +21325,7 @@
                 <a:ea typeface="Calibri" pitchFamily="34" charset="-122"/>
                 <a:cs typeface="Calibri" pitchFamily="34" charset="-120"/>
               </a:rPr>
-              <a:t>Keputusan bisnis harus bisa dipertahankan di hadapan pihak yang menanggung akibatnya.</a:t>
+              <a:t>Keputusan bisnis menuntut justifikasi yang dapat diuji secara rasional.</a:t>
             </a:r>
             <a:endParaRPr lang="en-US" sz="1350" dirty="0"/>
           </a:p>
@@ -21492,7 +21492,7 @@
                 <a:ea typeface="Calibri" pitchFamily="34" charset="-122"/>
                 <a:cs typeface="Calibri" pitchFamily="34" charset="-120"/>
               </a:rPr>
-              <a:t>Perusahaan yang masuk ke negara berkembang menghadapi suap, standar kerja rendah, dan diskriminasi.</a:t>
+              <a:t>Operasi lintas negara menghadirkan suap, standar ketenagakerjaan rendah, dan praktik diskriminatif.</a:t>
             </a:r>
             <a:endParaRPr lang="en-US" sz="1150" dirty="0"/>
           </a:p>
@@ -21659,7 +21659,7 @@
                 <a:ea typeface="Calibri" pitchFamily="34" charset="-122"/>
                 <a:cs typeface="Calibri" pitchFamily="34" charset="-120"/>
               </a:rPr>
-              <a:t>Manajer perlu membenarkan pilihannya kepada pemegang saham, karyawan, dan masyarakat luas.</a:t>
+              <a:t>Pilihan manajerial wajib dipertanggungjawabkan kepada pemegang saham, karyawan, dan masyarakat.</a:t>
             </a:r>
             <a:endParaRPr lang="en-US" sz="1150" dirty="0"/>
           </a:p>
@@ -21826,7 +21826,7 @@
                 <a:ea typeface="Calibri" pitchFamily="34" charset="-122"/>
                 <a:cs typeface="Calibri" pitchFamily="34" charset="-120"/>
               </a:rPr>
-              <a:t>Pihak yang menyebut sebuah perusahaan tidak etis memerlukan landasan yang sama kuatnya.</a:t>
+              <a:t>Penilaian bahwa suatu korporasi tidak etis menuntut landasan argumentatif yang setara.</a:t>
             </a:r>
             <a:endParaRPr lang="en-US" sz="1150" dirty="0"/>
           </a:p>
@@ -21910,7 +21910,7 @@
                 <a:ea typeface="Calibri" pitchFamily="34" charset="-122"/>
                 <a:cs typeface="Calibri" pitchFamily="34" charset="-120"/>
               </a:rPr>
-              <a:t>Normative ethical theories adalah aturan, prinsip, dan pendekatan yang menentukan mana yang benar dan mana yang salah.</a:t>
+              <a:t>Normative ethical theories adalah aturan, prinsip, dan pendekatan yang menetapkan benar dan salahnya suatu tindakan.</a:t>
             </a:r>
             <a:endParaRPr lang="en-US" sz="1250" dirty="0"/>
           </a:p>
@@ -22273,7 +22273,7 @@
                 <a:ea typeface="Calibri" pitchFamily="34" charset="-122"/>
                 <a:cs typeface="Calibri" pitchFamily="34" charset="-120"/>
               </a:rPr>
-              <a:t>Buku ini berdiri di posisi yang ketiga.</a:t>
+              <a:t>Crane et al. (2019) mengambil posisi ketiga.</a:t>
             </a:r>
             <a:endParaRPr lang="en-US" sz="1350" dirty="0"/>
           </a:p>
@@ -22440,7 +22440,7 @@
                 <a:ea typeface="Calibri" pitchFamily="34" charset="-122"/>
                 <a:cs typeface="Calibri" pitchFamily="34" charset="-120"/>
               </a:rPr>
-              <a:t>Ada prinsip moral abadi yang berlaku universal. Benar dan salah adalah kualitas objektif yang dapat ditentukan secara rasional.</a:t>
+              <a:t>Prinsip moral bersifat abadi dan universal. Benar dan salah merupakan kualitas objektif yang ditentukan secara rasional.</a:t>
             </a:r>
             <a:endParaRPr lang="en-US" sz="1150" dirty="0"/>
           </a:p>
@@ -22607,7 +22607,7 @@
                 <a:ea typeface="Calibri" pitchFamily="34" charset="-122"/>
                 <a:cs typeface="Calibri" pitchFamily="34" charset="-120"/>
               </a:rPr>
-              <a:t>Moralitas bergantung pada konteks dan bersifat subjektif. Tidak ada benar dan salah yang berlaku di mana saja.</a:t>
+              <a:t>Moralitas bersifat kontekstual dan subjektif. Tidak terdapat kategori benar dan salah yang berlaku universal.</a:t>
             </a:r>
             <a:endParaRPr lang="en-US" sz="1150" dirty="0"/>
           </a:p>
@@ -22774,7 +22774,7 @@
                 <a:ea typeface="Calibri" pitchFamily="34" charset="-122"/>
                 <a:cs typeface="Calibri" pitchFamily="34" charset="-120"/>
               </a:rPr>
-              <a:t>Nilai yang tidak sepadan dapat sama-sama sah dan perlu ditoleransi, tanpa menyamakan seluruh perspektif.</a:t>
+              <a:t>Nilai yang tidak sepadan dapat sama-sama sah dan menuntut toleransi, tanpa menyetarakan seluruh perspektif.</a:t>
             </a:r>
             <a:endParaRPr lang="en-US" sz="1150" dirty="0"/>
           </a:p>
@@ -22838,7 +22838,7 @@
                 <a:ea typeface="Calibri" pitchFamily="34" charset="-122"/>
                 <a:cs typeface="Calibri" pitchFamily="34" charset="-120"/>
               </a:rPr>
-              <a:t>Pluralism bukan berarti semua pendapat sama benar. Konflik antarperspektif tetap harus dihadapi, bukan didiamkan.</a:t>
+              <a:t>Pluralism tidak menyetarakan validitas seluruh pendapat. Konflik antarperspektif tetap menuntut penyelesaian.</a:t>
             </a:r>
             <a:endParaRPr lang="en-US" sz="1300" dirty="0"/>
           </a:p>
@@ -22922,7 +22922,7 @@
                 <a:ea typeface="Calibri" pitchFamily="34" charset="-122"/>
                 <a:cs typeface="Calibri" pitchFamily="34" charset="-120"/>
               </a:rPr>
-              <a:t>Kelemahannya: pluralism dikhawatirkan terlalu toleran. Sebagian praktik memang keliru dan tidak layak ditoleransi.</a:t>
+              <a:t>Kritik utamanya: pluralism berisiko terlalu permisif. Sebagian praktik keliru mendasar dan tidak layak ditoleransi.</a:t>
             </a:r>
             <a:endParaRPr lang="en-US" sz="1250" dirty="0"/>
           </a:p>
@@ -23285,7 +23285,7 @@
                 <a:ea typeface="Calibri" pitchFamily="34" charset="-122"/>
                 <a:cs typeface="Calibri" pitchFamily="34" charset="-120"/>
               </a:rPr>
-              <a:t>Lahir dari Pencerahan abad ke-18, menawarkan satu aturan untuk segala situasi.</a:t>
+              <a:t>Berakar pada Pencerahan abad ke-18 dan bersifat absolutis.</a:t>
             </a:r>
             <a:endParaRPr lang="en-US" sz="1350" dirty="0"/>
           </a:p>
@@ -23391,7 +23391,7 @@
                 <a:ea typeface="Calibri" pitchFamily="34" charset="-122"/>
                 <a:cs typeface="Calibri" pitchFamily="34" charset="-120"/>
               </a:rPr>
-              <a:t>Menilai moralitas dari hasil sebuah tindakan. Hasil yang diinginkan berarti tindakannya benar.</a:t>
+              <a:t>Moralitas ditentukan oleh hasil tindakan. Hasil yang diinginkan menjadi dasar pembenaran.</a:t>
             </a:r>
             <a:endParaRPr lang="en-US" sz="1150" dirty="0"/>
           </a:p>
@@ -23497,7 +23497,7 @@
                 <a:ea typeface="Calibri" pitchFamily="34" charset="-122"/>
                 <a:cs typeface="Calibri" pitchFamily="34" charset="-120"/>
               </a:rPr>
-              <a:t>Menilai moralitas dari prinsip dan prosedur memperolehnya. Mengutamakan apa yang benar, bukan yang diinginkan.</a:t>
+              <a:t>Moralitas ditentukan oleh prinsip dan prosedur. Yang benar didahulukan atas yang diinginkan.</a:t>
             </a:r>
             <a:endParaRPr lang="en-US" sz="1150" dirty="0"/>
           </a:p>
@@ -24041,7 +24041,7 @@
                 <a:ea typeface="Calibri" pitchFamily="34" charset="-122"/>
                 <a:cs typeface="Calibri" pitchFamily="34" charset="-120"/>
               </a:rPr>
-              <a:t>Konsep manusianya berbeda. Consequentialist memandang manusia digerakkan hasrat dan kesejahteraan; principle-based memandang manusia sebagai aktor moral rasional yang punya martabat.</a:t>
+              <a:t>Perbedaan mendasarnya terletak pada konsep manusia. Consequentialist: penggerak hasrat dan kesejahteraan. Principle-based: aktor moral rasional yang bermartabat.</a:t>
             </a:r>
             <a:endParaRPr lang="en-US" sz="1350" dirty="0"/>
           </a:p>
@@ -24365,7 +24365,7 @@
                 <a:ea typeface="Calibri" pitchFamily="34" charset="-122"/>
                 <a:cs typeface="Calibri" pitchFamily="34" charset="-120"/>
               </a:rPr>
-              <a:t>Satu kasus dipakai untuk menguji seluruh teori sepanjang bab ini.</a:t>
+              <a:t>Kasus penguji tunggal yang digunakan sepanjang bab.</a:t>
             </a:r>
             <a:endParaRPr lang="en-US" sz="1350" dirty="0"/>
           </a:p>
@@ -24426,7 +24426,7 @@
                 <a:ea typeface="Calibri" pitchFamily="34" charset="-122"/>
                 <a:cs typeface="Calibri" pitchFamily="34" charset="-120"/>
               </a:rPr>
-              <a:t>Situasinya</a:t>
+              <a:t>Ringkasan Kasus</a:t>
             </a:r>
             <a:endParaRPr lang="en-US" sz="1100" dirty="0"/>
           </a:p>
@@ -24471,7 +24471,7 @@
                 <a:ea typeface="Calibri" pitchFamily="34" charset="-122"/>
                 <a:cs typeface="Calibri" pitchFamily="34" charset="-120"/>
               </a:rPr>
-              <a:t>Anda product manager perusahaan kembang gula yang menyertakan mainan plastik. Di Thailand Anda memperoleh harga sepertiga dari pemasok Portugal dengan kualitas setara.</a:t>
+              <a:t>Seorang product manager perusahaan kembang gula memperoleh pemasok mainan plastik di Thailand pada harga sepertiga dari pemasok Portugal, dengan kualitas setara.</a:t>
             </a:r>
             <a:endParaRPr lang="en-US" sz="1250" dirty="0"/>
           </a:p>
@@ -24494,7 +24494,7 @@
                 <a:ea typeface="Calibri" pitchFamily="34" charset="-122"/>
                 <a:cs typeface="Calibri" pitchFamily="34" charset="-120"/>
               </a:rPr>
-              <a:t>Saat meninjau produksi, tidak ada bengkel kerja. Komponen dibawa pulang oleh sekitar 30 pria. Di sebuah bangunan seperti garasi, satu keluarga merakit mainan: ayah, ibu, dan enam anak berusia 5 sampai 14 tahun.</a:t>
+              <a:t>Peninjauan produksi tidak menemukan fasilitas kerja. Komponen dikerjakan di rumah oleh sekitar 30 pekerja. Satu keluarga merakit mainan: ayah, ibu, dan enam anak berusia 5 sampai 14 tahun.</a:t>
             </a:r>
             <a:endParaRPr lang="en-US" sz="1250" dirty="0"/>
           </a:p>
@@ -24517,7 +24517,7 @@
                 <a:ea typeface="Calibri" pitchFamily="34" charset="-122"/>
                 <a:cs typeface="Calibri" pitchFamily="34" charset="-120"/>
               </a:rPr>
-              <a:t>Ketika membeli suvenir untuk keponakan Anda yang berusia 5 dan 7 tahun, Anda mulai mempertanyakan semuanya.</a:t>
+              <a:t>Temuan tersebut memunculkan keraguan atas kelayakan etis kesepakatan yang telah dicapai.</a:t>
             </a:r>
             <a:endParaRPr lang="en-US" sz="1250" dirty="0"/>
           </a:p>
@@ -24578,7 +24578,7 @@
                 <a:ea typeface="Calibri" pitchFamily="34" charset="-122"/>
                 <a:cs typeface="Calibri" pitchFamily="34" charset="-120"/>
               </a:rPr>
-              <a:t>Dua Pertanyaan Buku</a:t>
+              <a:t>Pertanyaan Kasus</a:t>
             </a:r>
             <a:endParaRPr lang="en-US" sz="1350" dirty="0"/>
           </a:p>
@@ -24624,7 +24624,7 @@
                 <a:ea typeface="Calibri" pitchFamily="34" charset="-122"/>
                 <a:cs typeface="Calibri" pitchFamily="34" charset="-120"/>
               </a:rPr>
-              <a:t>Apa reaksi spontan Anda sebagai product manager?</a:t>
+              <a:t>Bagaimana respons awal seorang product manager atas temuan ini?</a:t>
             </a:r>
             <a:endParaRPr lang="en-US" sz="1200" dirty="0"/>
           </a:p>
@@ -24648,7 +24648,7 @@
                 <a:ea typeface="Calibri" pitchFamily="34" charset="-122"/>
                 <a:cs typeface="Calibri" pitchFamily="34" charset="-120"/>
               </a:rPr>
-              <a:t>Nilai atau prinsip apa yang membuat Anda bereaksi begitu?</a:t>
+              <a:t>Nilai atau prinsip apa yang mendasari respons tersebut?</a:t>
             </a:r>
             <a:endParaRPr lang="en-US" sz="1200" dirty="0"/>
           </a:p>
@@ -24765,7 +24765,7 @@
                 <a:ea typeface="Calibri" pitchFamily="34" charset="-122"/>
                 <a:cs typeface="Calibri" pitchFamily="34" charset="-120"/>
               </a:rPr>
-              <a:t>menghasilkan sembilan jawaban berbeda atas rangkaian fakta yang persis sama.</a:t>
+              <a:t>menghasilkan sembilan penilaian berbeda atas rangkaian fakta yang identik.</a:t>
             </a:r>
             <a:endParaRPr lang="en-US" sz="1150" dirty="0"/>
           </a:p>
@@ -24829,7 +24829,7 @@
                 <a:ea typeface="Calibri" pitchFamily="34" charset="-122"/>
                 <a:cs typeface="Calibri" pitchFamily="34" charset="-120"/>
               </a:rPr>
-              <a:t>Simpan reaksi pertama Anda. Di akhir sesi kita bandingkan dengan hasil setelah kesembilan teori dijalankan.</a:t>
+              <a:t>Respons intuitif akan dibandingkan dengan hasil penerapan kesembilan teori pada akhir pembahasan.</a:t>
             </a:r>
             <a:endParaRPr lang="en-US" sz="1300" dirty="0"/>
           </a:p>
@@ -25362,7 +25362,7 @@
                 <a:ea typeface="Calibri" pitchFamily="34" charset="-122"/>
                 <a:cs typeface="Calibri" pitchFamily="34" charset="-120"/>
               </a:rPr>
-              <a:t>Adam Smith: kepentingan diri yang dikejar bersama dianggap menghasilkan kesejahteraan kolektif lewat mekanisme pasar.</a:t>
+              <a:t>Smith (1776): agregasi kepentingan diri menghasilkan kesejahteraan kolektif melalui mekanisme pasar.</a:t>
             </a:r>
             <a:endParaRPr lang="en-US" sz="1150" dirty="0"/>
           </a:p>
@@ -25529,7 +25529,7 @@
                 <a:ea typeface="Calibri" pitchFamily="34" charset="-122"/>
                 <a:cs typeface="Calibri" pitchFamily="34" charset="-120"/>
               </a:rPr>
-              <a:t>Kepentingan jangka panjang justru menuntut kejujuran dan reputasi, bukan keuntungan yang habis dalam semalam.</a:t>
+              <a:t>Orientasi jangka panjang menuntut kejujuran dan reputasi, bukan maksimasi keuntungan sesaat.</a:t>
             </a:r>
             <a:endParaRPr lang="en-US" sz="1150" dirty="0"/>
           </a:p>
@@ -25696,7 +25696,7 @@
                 <a:ea typeface="Calibri" pitchFamily="34" charset="-122"/>
                 <a:cs typeface="Calibri" pitchFamily="34" charset="-120"/>
               </a:rPr>
-              <a:t>Pasar gagal ketika ada monopoli, informasi timpang, dan dampak yang tidak pernah masuk ke dalam harga.</a:t>
+              <a:t>Mekanisme pasar gagal pada kondisi monopoli, asimetri informasi, dan eksternalitas yang tidak terinternalisasi.</a:t>
             </a:r>
             <a:endParaRPr lang="en-US" sz="1150" dirty="0"/>
           </a:p>
@@ -25760,7 +25760,7 @@
                 <a:ea typeface="Calibri" pitchFamily="34" charset="-122"/>
                 <a:cs typeface="Calibri" pitchFamily="34" charset="-120"/>
               </a:rPr>
-              <a:t>Pada Ethical Dilemma 3, melanjutkan kesepakatan menguntungkan Anda. Risiko reputasi membuat jawabannya tidak selugas itu.</a:t>
+              <a:t>Penerapan pada Ethical Dilemma 3: kesepakatan menguntungkan pelaku, namun risiko reputasi menahan kesimpulannya.</a:t>
             </a:r>
             <a:endParaRPr lang="en-US" sz="1300" dirty="0"/>
           </a:p>
@@ -26293,7 +26293,7 @@
                 <a:ea typeface="Calibri" pitchFamily="34" charset="-122"/>
                 <a:cs typeface="Calibri" pitchFamily="34" charset="-120"/>
               </a:rPr>
-              <a:t>Akibat sebuah tindakan yang menentukan benar salahnya.</a:t>
+              <a:t>Akibat tindakan menjadi penentu benar dan salahnya.</a:t>
             </a:r>
             <a:endParaRPr lang="en-US" sz="1150" dirty="0"/>
           </a:p>
@@ -26460,7 +26460,7 @@
                 <a:ea typeface="Calibri" pitchFamily="34" charset="-122"/>
                 <a:cs typeface="Calibri" pitchFamily="34" charset="-120"/>
               </a:rPr>
-              <a:t>Utility diukur lewat pleasure, dikurangi pain, menjadi net pleasure.</a:t>
+              <a:t>Utilitas diukur sebagai pleasure dikurangi pain, menghasilkan net pleasure.</a:t>
             </a:r>
             <a:endParaRPr lang="en-US" sz="1150" dirty="0"/>
           </a:p>
@@ -26627,7 +26627,7 @@
                 <a:ea typeface="Calibri" pitchFamily="34" charset="-122"/>
                 <a:cs typeface="Calibri" pitchFamily="34" charset="-120"/>
               </a:rPr>
-              <a:t>Bukan sebagian akibat baik, melainkan jumlah terbesar yang mungkin.</a:t>
+              <a:t>Bukan sebagian akibat baik, melainkan agregat terbesar yang mungkin.</a:t>
             </a:r>
             <a:endParaRPr lang="en-US" sz="1150" dirty="0"/>
           </a:p>
@@ -26794,7 +26794,7 @@
                 <a:ea typeface="Calibri" pitchFamily="34" charset="-122"/>
                 <a:cs typeface="Calibri" pitchFamily="34" charset="-120"/>
               </a:rPr>
-              <a:t>Akibat untuk setiap orang wajib ikut dipertimbangkan.</a:t>
+              <a:t>Akibat bagi seluruh pihak wajib dipertimbangkan.</a:t>
             </a:r>
             <a:endParaRPr lang="en-US" sz="1150" dirty="0"/>
           </a:p>
@@ -26858,7 +26858,7 @@
                 <a:ea typeface="Calibri" pitchFamily="34" charset="-122"/>
                 <a:cs typeface="Calibri" pitchFamily="34" charset="-120"/>
               </a:rPr>
-              <a:t>Neraca pleasure dan pain pada Ethical Dilemma 3 condong ke melanjutkan kesepakatan. Hasil yang tidak nyaman itulah yang memunculkan empat masalah berikut.</a:t>
+              <a:t>Neraca utilitas pada Ethical Dilemma 3 condong pada kelanjutan kesepakatan. Kesimpulan inilah yang memunculkan empat keberatan berikut.</a:t>
             </a:r>
             <a:endParaRPr lang="en-US" sz="1300" dirty="0"/>
           </a:p>
@@ -27182,7 +27182,7 @@
                 <a:ea typeface="Calibri" pitchFamily="34" charset="-122"/>
                 <a:cs typeface="Calibri" pitchFamily="34" charset="-120"/>
               </a:rPr>
-              <a:t>Empat masalah pokok, lalu penyempurnaan Mill menjadi dua jenis penilaian.</a:t>
+              <a:t>Empat keberatan pokok dan penyempurnaan Mill menjadi dua varian.</a:t>
             </a:r>
             <a:endParaRPr lang="en-US" sz="1350" dirty="0"/>
           </a:p>
@@ -27349,7 +27349,7 @@
                 <a:ea typeface="Calibri" pitchFamily="34" charset="-122"/>
                 <a:cs typeface="Calibri" pitchFamily="34" charset="-120"/>
               </a:rPr>
-              <a:t>Ukuran pleasure dan pain bergantung pada siapa yang menganalisis.</a:t>
+              <a:t>Ukuran pleasure dan pain bergantung pada perspektif penganalisis.</a:t>
             </a:r>
             <a:endParaRPr lang="en-US" sz="1100" dirty="0"/>
           </a:p>
@@ -27516,7 +27516,7 @@
                 <a:ea typeface="Calibri" pitchFamily="34" charset="-122"/>
                 <a:cs typeface="Calibri" pitchFamily="34" charset="-120"/>
               </a:rPr>
-              <a:t>Setiap pihak berbobot sama. Diri sendiri tidak boleh diistimewakan.</a:t>
+              <a:t>Seluruh pihak berbobot setara. Pengistimewaan diri tidak dibenarkan.</a:t>
             </a:r>
             <a:endParaRPr lang="en-US" sz="1100" dirty="0"/>
           </a:p>
@@ -27683,7 +27683,7 @@
                 <a:ea typeface="Calibri" pitchFamily="34" charset="-122"/>
                 <a:cs typeface="Calibri" pitchFamily="34" charset="-120"/>
               </a:rPr>
-              <a:t>Sulit memberi nilai uang pada penderitaan dan kesempatan yang hilang.</a:t>
+              <a:t>Penderitaan dan kesempatan yang hilang sulit dinyatakan dalam satuan moneter.</a:t>
             </a:r>
             <a:endParaRPr lang="en-US" sz="1100" dirty="0"/>
           </a:p>
@@ -27850,7 +27850,7 @@
                 <a:ea typeface="Calibri" pitchFamily="34" charset="-122"/>
                 <a:cs typeface="Calibri" pitchFamily="34" charset="-120"/>
               </a:rPr>
-              <a:t>Kepentingan minoritas mudah terabaikan oleh jumlah mayoritas.</a:t>
+              <a:t>Agregasi mayoritas berpotensi meniadakan kepentingan minoritas.</a:t>
             </a:r>
             <a:endParaRPr lang="en-US" sz="1100" dirty="0"/>
           </a:p>
@@ -27956,7 +27956,7 @@
                 <a:ea typeface="Calibri" pitchFamily="34" charset="-122"/>
                 <a:cs typeface="Calibri" pitchFamily="34" charset="-120"/>
               </a:rPr>
-              <a:t>Menilai tindakan tunggal. Pada dilema ini dapat menyimpulkan tindakan tersebut benar, karena pain anak dianggap kecil.</a:t>
+              <a:t>Unit analisisnya tindakan tunggal. Pada dilema ini dapat membenarkan kesepakatan, karena pain dinilai kecil.</a:t>
             </a:r>
             <a:endParaRPr lang="en-US" sz="1150" dirty="0"/>
           </a:p>
@@ -28062,7 +28062,7 @@
                 <a:ea typeface="Calibri" pitchFamily="34" charset="-122"/>
                 <a:cs typeface="Calibri" pitchFamily="34" charset="-120"/>
               </a:rPr>
-              <a:t>Menilai kelas tindakan. Pada dilema ini menolak, karena penderitaan pekerja anak melampaui manfaat ekonominya.</a:t>
+              <a:t>Unit analisisnya kelas tindakan. Pada dilema ini menolak, karena penderitaan pekerja anak melampaui manfaat ekonominya.</a:t>
             </a:r>
             <a:endParaRPr lang="en-US" sz="1150" dirty="0"/>
           </a:p>
@@ -28126,7 +28126,7 @@
                 <a:ea typeface="Calibri" pitchFamily="34" charset="-122"/>
                 <a:cs typeface="Calibri" pitchFamily="34" charset="-120"/>
               </a:rPr>
-              <a:t>Dua jenis, dua kesimpulan berlawanan, atas kasus yang sama. Perbedaan ini akan muncul lagi pada kasus oil sands.</a:t>
+              <a:t>Dua varian menghasilkan kesimpulan berlawanan atas kasus identik. Divergensi ini berulang pada kasus oil sands.</a:t>
             </a:r>
             <a:endParaRPr lang="en-US" sz="1300" dirty="0"/>
           </a:p>

--- a/business-ethics/chapter-3/decks/Deck-1-Evaluating-Business-Ethics.pptx
+++ b/business-ethics/chapter-3/decks/Deck-1-Evaluating-Business-Ethics.pptx
@@ -3682,7 +3682,7 @@
         </p:nvSpPr>
         <p:spPr>
           <a:xfrm>
-            <a:off x="9163202" y="420624"/>
+            <a:off x="8438998" y="420624"/>
             <a:ext cx="1143914" cy="283464"/>
           </a:xfrm>
           <a:prstGeom prst="roundRect">
@@ -3709,7 +3709,7 @@
         </p:nvSpPr>
         <p:spPr>
           <a:xfrm>
-            <a:off x="9163202" y="420624"/>
+            <a:off x="8438998" y="420624"/>
             <a:ext cx="1143914" cy="283464"/>
           </a:xfrm>
           <a:prstGeom prst="rect">
@@ -3748,8 +3748,8 @@
         </p:nvSpPr>
         <p:spPr>
           <a:xfrm>
-            <a:off x="10425989" y="420624"/>
-            <a:ext cx="1143914" cy="283464"/>
+            <a:off x="9701784" y="420624"/>
+            <a:ext cx="1868119" cy="283464"/>
           </a:xfrm>
           <a:prstGeom prst="roundRect">
             <a:avLst>
@@ -3775,8 +3775,8 @@
         </p:nvSpPr>
         <p:spPr>
           <a:xfrm>
-            <a:off x="10425989" y="420624"/>
-            <a:ext cx="1143914" cy="283464"/>
+            <a:off x="9701784" y="420624"/>
+            <a:ext cx="1868119" cy="283464"/>
           </a:xfrm>
           <a:prstGeom prst="rect">
             <a:avLst/>
@@ -3800,7 +3800,7 @@
                 <a:ea typeface="Calibri" pitchFamily="34" charset="-122"/>
                 <a:cs typeface="Calibri" pitchFamily="34" charset="-120"/>
               </a:rPr>
-              <a:t>CHAPTER 3</a:t>
+              <a:t>PRESENTASI MATERI</a:t>
             </a:r>
             <a:endParaRPr lang="en-US" sz="950" dirty="0"/>
           </a:p>
@@ -3842,7 +3842,7 @@
                 <a:ea typeface="Calibri" pitchFamily="34" charset="-122"/>
                 <a:cs typeface="Calibri" pitchFamily="34" charset="-120"/>
               </a:rPr>
-              <a:t>Crane, Matten, Glozer &amp; Spence (2019) · Business Ethics, edisi kelima</a:t>
+              <a:t>Teori Etika Normatif dan Penerapannya</a:t>
             </a:r>
             <a:endParaRPr lang="en-US" sz="1350" dirty="0"/>
           </a:p>
@@ -4123,45 +4123,6 @@
                 <a:cs typeface="Courier New" pitchFamily="34" charset="-120"/>
               </a:rPr>
               <a:t>25/574338/PEK/31801</a:t>
-            </a:r>
-            <a:endParaRPr lang="en-US" sz="1050" dirty="0"/>
-          </a:p>
-        </p:txBody>
-      </p:sp>
-      <p:sp>
-        <p:nvSpPr>
-          <p:cNvPr id="64" name="Text 62"/>
-          <p:cNvSpPr txBox="1"/>
-          <p:nvPr/>
-        </p:nvSpPr>
-        <p:spPr>
-          <a:xfrm>
-            <a:off x="621792" y="6272784"/>
-            <a:ext cx="10948111" cy="256032"/>
-          </a:xfrm>
-          <a:prstGeom prst="rect">
-            <a:avLst/>
-          </a:prstGeom>
-          <a:noFill/>
-          <a:ln/>
-        </p:spPr>
-        <p:txBody>
-          <a:bodyPr wrap="square" lIns="0" tIns="0" rIns="0" bIns="0" rtlCol="0" anchor="t"/>
-          <a:lstStyle/>
-          <a:p>
-            <a:pPr indent="0" marL="0">
-              <a:buNone/>
-            </a:pPr>
-            <a:r>
-              <a:rPr lang="en-US" sz="1050" dirty="0">
-                <a:solidFill>
-                  <a:srgbClr val="6B7A90"/>
-                </a:solidFill>
-                <a:latin typeface="Calibri" pitchFamily="34" charset="0"/>
-                <a:ea typeface="Calibri" pitchFamily="34" charset="-122"/>
-                <a:cs typeface="Calibri" pitchFamily="34" charset="-120"/>
-              </a:rPr>
-              <a:t>Case 3 · Canada’s Oil Sands · halaman 129–134</a:t>
             </a:r>
             <a:endParaRPr lang="en-US" sz="1050" dirty="0"/>
           </a:p>
@@ -4499,17 +4460,17 @@
         </p:nvSpPr>
         <p:spPr>
           <a:xfrm>
-            <a:off x="896112" y="1682496"/>
-            <a:ext cx="10399471" cy="420624"/>
-          </a:xfrm>
-          <a:prstGeom prst="rect">
-            <a:avLst/>
-          </a:prstGeom>
-          <a:noFill/>
-          <a:ln/>
-        </p:spPr>
-        <p:txBody>
-          <a:bodyPr wrap="square" lIns="0" tIns="0" rIns="0" bIns="0" rtlCol="0" anchor="t"/>
+            <a:off x="896112" y="1609344"/>
+            <a:ext cx="10399471" cy="566928"/>
+          </a:xfrm>
+          <a:prstGeom prst="rect">
+            <a:avLst/>
+          </a:prstGeom>
+          <a:noFill/>
+          <a:ln/>
+        </p:spPr>
+        <p:txBody>
+          <a:bodyPr wrap="square" lIns="0" tIns="0" rIns="0" bIns="0" rtlCol="0" anchor="ctr"/>
           <a:lstStyle/>
           <a:p>
             <a:pPr indent="0" marL="0">
@@ -5632,17 +5593,17 @@
         </p:nvSpPr>
         <p:spPr>
           <a:xfrm>
-            <a:off x="896112" y="1682496"/>
-            <a:ext cx="10399471" cy="420624"/>
-          </a:xfrm>
-          <a:prstGeom prst="rect">
-            <a:avLst/>
-          </a:prstGeom>
-          <a:noFill/>
-          <a:ln/>
-        </p:spPr>
-        <p:txBody>
-          <a:bodyPr wrap="square" lIns="0" tIns="0" rIns="0" bIns="0" rtlCol="0" anchor="t"/>
+            <a:off x="896112" y="1609344"/>
+            <a:ext cx="10399471" cy="566928"/>
+          </a:xfrm>
+          <a:prstGeom prst="rect">
+            <a:avLst/>
+          </a:prstGeom>
+          <a:noFill/>
+          <a:ln/>
+        </p:spPr>
+        <p:txBody>
+          <a:bodyPr wrap="square" lIns="0" tIns="0" rIns="0" bIns="0" rtlCol="0" anchor="ctr"/>
           <a:lstStyle/>
           <a:p>
             <a:pPr indent="0" marL="0">
@@ -6134,7 +6095,7 @@
                 <a:ea typeface="Calibri" pitchFamily="34" charset="-122"/>
                 <a:cs typeface="Calibri" pitchFamily="34" charset="-120"/>
               </a:rPr>
-              <a:t>UN Guiding Principles atau Prinsip Ruggie (2011)</a:t>
+              <a:t>UN Guiding Principles on Business and Human Rights</a:t>
             </a:r>
             <a:endParaRPr lang="en-US" sz="1200" dirty="0"/>
           </a:p>
@@ -6964,17 +6925,17 @@
         </p:nvSpPr>
         <p:spPr>
           <a:xfrm>
-            <a:off x="896112" y="1682496"/>
-            <a:ext cx="10399471" cy="420624"/>
-          </a:xfrm>
-          <a:prstGeom prst="rect">
-            <a:avLst/>
-          </a:prstGeom>
-          <a:noFill/>
-          <a:ln/>
-        </p:spPr>
-        <p:txBody>
-          <a:bodyPr wrap="square" lIns="0" tIns="0" rIns="0" bIns="0" rtlCol="0" anchor="t"/>
+            <a:off x="896112" y="1609344"/>
+            <a:ext cx="10399471" cy="566928"/>
+          </a:xfrm>
+          <a:prstGeom prst="rect">
+            <a:avLst/>
+          </a:prstGeom>
+          <a:noFill/>
+          <a:ln/>
+        </p:spPr>
+        <p:txBody>
+          <a:bodyPr wrap="square" lIns="0" tIns="0" rIns="0" bIns="0" rtlCol="0" anchor="ctr"/>
           <a:lstStyle/>
           <a:p>
             <a:pPr indent="0" marL="0">
@@ -7616,7 +7577,7 @@
                 <a:ea typeface="Calibri" pitchFamily="34" charset="-122"/>
                 <a:cs typeface="Calibri" pitchFamily="34" charset="-120"/>
               </a:rPr>
-              <a:t>ENAM KRITIK</a:t>
+              <a:t>BATAS TEORI</a:t>
             </a:r>
             <a:endParaRPr lang="en-US" sz="950" dirty="0"/>
           </a:p>
@@ -7682,7 +7643,7 @@
                 <a:ea typeface="Calibri" pitchFamily="34" charset="-122"/>
                 <a:cs typeface="Calibri" pitchFamily="34" charset="-120"/>
               </a:rPr>
-              <a:t>HALAMAN 108</a:t>
+              <a:t>ENAM KRITIK</a:t>
             </a:r>
             <a:endParaRPr lang="en-US" sz="950" dirty="0"/>
           </a:p>
@@ -7877,8 +7838,8 @@
         </p:nvSpPr>
         <p:spPr>
           <a:xfrm>
-            <a:off x="859536" y="2432304"/>
-            <a:ext cx="3039770" cy="274320"/>
+            <a:off x="859536" y="2450592"/>
+            <a:ext cx="3039770" cy="292608"/>
           </a:xfrm>
           <a:prstGeom prst="rect">
             <a:avLst/>
@@ -7894,7 +7855,7 @@
               <a:buNone/>
             </a:pPr>
             <a:r>
-              <a:rPr lang="en-US" sz="1500" b="1" dirty="0">
+              <a:rPr lang="en-US" sz="1600" b="1" dirty="0">
                 <a:solidFill>
                   <a:srgbClr val="FFFFFF"/>
                 </a:solidFill>
@@ -7904,7 +7865,7 @@
               </a:rPr>
               <a:t>Too Abstract</a:t>
             </a:r>
-            <a:endParaRPr lang="en-US" sz="1500" dirty="0"/>
+            <a:endParaRPr lang="en-US" sz="1600" dirty="0"/>
           </a:p>
         </p:txBody>
       </p:sp>
@@ -7916,8 +7877,8 @@
         </p:nvSpPr>
         <p:spPr>
           <a:xfrm>
-            <a:off x="859536" y="2706624"/>
-            <a:ext cx="3039770" cy="237744"/>
+            <a:off x="859536" y="2852928"/>
+            <a:ext cx="3039770" cy="768096"/>
           </a:xfrm>
           <a:prstGeom prst="rect">
             <a:avLst/>
@@ -7930,52 +7891,13 @@
           <a:lstStyle/>
           <a:p>
             <a:pPr indent="0" marL="0">
-              <a:buNone/>
-            </a:pPr>
-            <a:r>
-              <a:rPr lang="en-US" sz="1000" i="1" dirty="0">
-                <a:solidFill>
-                  <a:srgbClr val="FFAD96"/>
-                </a:solidFill>
-                <a:latin typeface="Calibri" pitchFamily="34" charset="0"/>
-                <a:ea typeface="Calibri" pitchFamily="34" charset="-122"/>
-                <a:cs typeface="Calibri" pitchFamily="34" charset="-120"/>
-              </a:rPr>
-              <a:t>Stark (1994), Brenkert (2010)</a:t>
-            </a:r>
-            <a:endParaRPr lang="en-US" sz="1000" dirty="0"/>
-          </a:p>
-        </p:txBody>
-      </p:sp>
-      <p:sp>
-        <p:nvSpPr>
-          <p:cNvPr id="14" name="Text 12"/>
-          <p:cNvSpPr txBox="1"/>
-          <p:nvPr/>
-        </p:nvSpPr>
-        <p:spPr>
-          <a:xfrm>
-            <a:off x="859536" y="2980944"/>
-            <a:ext cx="3039770" cy="640080"/>
-          </a:xfrm>
-          <a:prstGeom prst="rect">
-            <a:avLst/>
-          </a:prstGeom>
-          <a:noFill/>
-          <a:ln/>
-        </p:spPr>
-        <p:txBody>
-          <a:bodyPr wrap="square" lIns="0" tIns="0" rIns="0" bIns="0" rtlCol="0" anchor="t"/>
-          <a:lstStyle/>
-          <a:p>
-            <a:pPr indent="0" marL="0">
               <a:lnSpc>
-                <a:spcPts val="1500"/>
+                <a:spcPts val="1600"/>
               </a:lnSpc>
               <a:buNone/>
             </a:pPr>
             <a:r>
-              <a:rPr lang="en-US" sz="1100" dirty="0">
+              <a:rPr lang="en-US" sz="1150" dirty="0">
                 <a:solidFill>
                   <a:srgbClr val="E8E4DC"/>
                 </a:solidFill>
@@ -7985,13 +7907,13 @@
               </a:rPr>
               <a:t>Terlalu teoretis untuk keprihatinan sehari-hari seorang manajer.</a:t>
             </a:r>
-            <a:endParaRPr lang="en-US" sz="1100" dirty="0"/>
-          </a:p>
-        </p:txBody>
-      </p:sp>
-      <p:sp>
-        <p:nvSpPr>
-          <p:cNvPr id="15" name="Shape 13"/>
+            <a:endParaRPr lang="en-US" sz="1150" dirty="0"/>
+          </a:p>
+        </p:txBody>
+      </p:sp>
+      <p:sp>
+        <p:nvSpPr>
+          <p:cNvPr id="14" name="Shape 12"/>
           <p:cNvSpPr/>
           <p:nvPr/>
         </p:nvSpPr>
@@ -8013,7 +7935,7 @@
       </p:sp>
       <p:sp>
         <p:nvSpPr>
-          <p:cNvPr id="16" name="Shape 14"/>
+          <p:cNvPr id="15" name="Shape 13"/>
           <p:cNvSpPr/>
           <p:nvPr/>
         </p:nvSpPr>
@@ -8035,7 +7957,7 @@
       </p:sp>
       <p:sp>
         <p:nvSpPr>
-          <p:cNvPr id="17" name="Text 15"/>
+          <p:cNvPr id="16" name="Text 14"/>
           <p:cNvSpPr txBox="1"/>
           <p:nvPr/>
         </p:nvSpPr>
@@ -8074,14 +7996,53 @@
       </p:sp>
       <p:sp>
         <p:nvSpPr>
+          <p:cNvPr id="17" name="Text 15"/>
+          <p:cNvSpPr txBox="1"/>
+          <p:nvPr/>
+        </p:nvSpPr>
+        <p:spPr>
+          <a:xfrm>
+            <a:off x="4575962" y="2450592"/>
+            <a:ext cx="3039770" cy="292608"/>
+          </a:xfrm>
+          <a:prstGeom prst="rect">
+            <a:avLst/>
+          </a:prstGeom>
+          <a:noFill/>
+          <a:ln/>
+        </p:spPr>
+        <p:txBody>
+          <a:bodyPr wrap="square" lIns="0" tIns="0" rIns="0" bIns="0" rtlCol="0" anchor="t"/>
+          <a:lstStyle/>
+          <a:p>
+            <a:pPr indent="0" marL="0">
+              <a:buNone/>
+            </a:pPr>
+            <a:r>
+              <a:rPr lang="en-US" sz="1600" b="1" dirty="0">
+                <a:solidFill>
+                  <a:srgbClr val="0E1626"/>
+                </a:solidFill>
+                <a:latin typeface="Calibri" pitchFamily="34" charset="0"/>
+                <a:ea typeface="Calibri" pitchFamily="34" charset="-122"/>
+                <a:cs typeface="Calibri" pitchFamily="34" charset="-120"/>
+              </a:rPr>
+              <a:t>Too Narrow</a:t>
+            </a:r>
+            <a:endParaRPr lang="en-US" sz="1600" dirty="0"/>
+          </a:p>
+        </p:txBody>
+      </p:sp>
+      <p:sp>
+        <p:nvSpPr>
           <p:cNvPr id="18" name="Text 16"/>
           <p:cNvSpPr txBox="1"/>
           <p:nvPr/>
         </p:nvSpPr>
         <p:spPr>
           <a:xfrm>
-            <a:off x="4575962" y="2432304"/>
-            <a:ext cx="3039770" cy="274320"/>
+            <a:off x="4575962" y="2852928"/>
+            <a:ext cx="3039770" cy="768096"/>
           </a:xfrm>
           <a:prstGeom prst="rect">
             <a:avLst/>
@@ -8094,91 +8055,13 @@
           <a:lstStyle/>
           <a:p>
             <a:pPr indent="0" marL="0">
-              <a:buNone/>
-            </a:pPr>
-            <a:r>
-              <a:rPr lang="en-US" sz="1500" b="1" dirty="0">
-                <a:solidFill>
-                  <a:srgbClr val="0E1626"/>
-                </a:solidFill>
-                <a:latin typeface="Calibri" pitchFamily="34" charset="0"/>
-                <a:ea typeface="Calibri" pitchFamily="34" charset="-122"/>
-                <a:cs typeface="Calibri" pitchFamily="34" charset="-120"/>
-              </a:rPr>
-              <a:t>Too Narrow</a:t>
-            </a:r>
-            <a:endParaRPr lang="en-US" sz="1500" dirty="0"/>
-          </a:p>
-        </p:txBody>
-      </p:sp>
-      <p:sp>
-        <p:nvSpPr>
-          <p:cNvPr id="19" name="Text 17"/>
-          <p:cNvSpPr txBox="1"/>
-          <p:nvPr/>
-        </p:nvSpPr>
-        <p:spPr>
-          <a:xfrm>
-            <a:off x="4575962" y="2706624"/>
-            <a:ext cx="3039770" cy="237744"/>
-          </a:xfrm>
-          <a:prstGeom prst="rect">
-            <a:avLst/>
-          </a:prstGeom>
-          <a:noFill/>
-          <a:ln/>
-        </p:spPr>
-        <p:txBody>
-          <a:bodyPr wrap="square" lIns="0" tIns="0" rIns="0" bIns="0" rtlCol="0" anchor="t"/>
-          <a:lstStyle/>
-          <a:p>
-            <a:pPr indent="0" marL="0">
-              <a:buNone/>
-            </a:pPr>
-            <a:r>
-              <a:rPr lang="en-US" sz="1000" i="1" dirty="0">
-                <a:solidFill>
-                  <a:srgbClr val="635E8E"/>
-                </a:solidFill>
-                <a:latin typeface="Calibri" pitchFamily="34" charset="0"/>
-                <a:ea typeface="Calibri" pitchFamily="34" charset="-122"/>
-                <a:cs typeface="Calibri" pitchFamily="34" charset="-120"/>
-              </a:rPr>
-              <a:t>Crane et al. (2019)</a:t>
-            </a:r>
-            <a:endParaRPr lang="en-US" sz="1000" dirty="0"/>
-          </a:p>
-        </p:txBody>
-      </p:sp>
-      <p:sp>
-        <p:nvSpPr>
-          <p:cNvPr id="20" name="Text 18"/>
-          <p:cNvSpPr txBox="1"/>
-          <p:nvPr/>
-        </p:nvSpPr>
-        <p:spPr>
-          <a:xfrm>
-            <a:off x="4575962" y="2980944"/>
-            <a:ext cx="3039770" cy="640080"/>
-          </a:xfrm>
-          <a:prstGeom prst="rect">
-            <a:avLst/>
-          </a:prstGeom>
-          <a:noFill/>
-          <a:ln/>
-        </p:spPr>
-        <p:txBody>
-          <a:bodyPr wrap="square" lIns="0" tIns="0" rIns="0" bIns="0" rtlCol="0" anchor="t"/>
-          <a:lstStyle/>
-          <a:p>
-            <a:pPr indent="0" marL="0">
               <a:lnSpc>
-                <a:spcPts val="1500"/>
+                <a:spcPts val="1600"/>
               </a:lnSpc>
               <a:buNone/>
             </a:pPr>
             <a:r>
-              <a:rPr lang="en-US" sz="1100" dirty="0">
+              <a:rPr lang="en-US" sz="1150" dirty="0">
                 <a:solidFill>
                   <a:srgbClr val="2A3243"/>
                 </a:solidFill>
@@ -8188,13 +8071,13 @@
               </a:rPr>
               <a:t>Setiap teori memaksa pemilihan satu aspek moralitas, padahal seluruhnya relevan.</a:t>
             </a:r>
-            <a:endParaRPr lang="en-US" sz="1100" dirty="0"/>
-          </a:p>
-        </p:txBody>
-      </p:sp>
-      <p:sp>
-        <p:nvSpPr>
-          <p:cNvPr id="21" name="Shape 19"/>
+            <a:endParaRPr lang="en-US" sz="1150" dirty="0"/>
+          </a:p>
+        </p:txBody>
+      </p:sp>
+      <p:sp>
+        <p:nvSpPr>
+          <p:cNvPr id="19" name="Shape 17"/>
           <p:cNvSpPr/>
           <p:nvPr/>
         </p:nvSpPr>
@@ -8216,7 +8099,7 @@
       </p:sp>
       <p:sp>
         <p:nvSpPr>
-          <p:cNvPr id="22" name="Shape 20"/>
+          <p:cNvPr id="20" name="Shape 18"/>
           <p:cNvSpPr/>
           <p:nvPr/>
         </p:nvSpPr>
@@ -8238,7 +8121,7 @@
       </p:sp>
       <p:sp>
         <p:nvSpPr>
-          <p:cNvPr id="23" name="Text 21"/>
+          <p:cNvPr id="21" name="Text 19"/>
           <p:cNvSpPr txBox="1"/>
           <p:nvPr/>
         </p:nvSpPr>
@@ -8277,14 +8160,14 @@
       </p:sp>
       <p:sp>
         <p:nvSpPr>
-          <p:cNvPr id="24" name="Text 22"/>
-          <p:cNvSpPr txBox="1"/>
-          <p:nvPr/>
-        </p:nvSpPr>
-        <p:spPr>
-          <a:xfrm>
-            <a:off x="8292389" y="2432304"/>
-            <a:ext cx="3039770" cy="274320"/>
+          <p:cNvPr id="22" name="Text 20"/>
+          <p:cNvSpPr txBox="1"/>
+          <p:nvPr/>
+        </p:nvSpPr>
+        <p:spPr>
+          <a:xfrm>
+            <a:off x="8292389" y="2450592"/>
+            <a:ext cx="3039770" cy="292608"/>
           </a:xfrm>
           <a:prstGeom prst="rect">
             <a:avLst/>
@@ -8300,7 +8183,7 @@
               <a:buNone/>
             </a:pPr>
             <a:r>
-              <a:rPr lang="en-US" sz="1500" b="1" dirty="0">
+              <a:rPr lang="en-US" sz="1600" b="1" dirty="0">
                 <a:solidFill>
                   <a:srgbClr val="FFFFFF"/>
                 </a:solidFill>
@@ -8310,20 +8193,20 @@
               </a:rPr>
               <a:t>Too Objective</a:t>
             </a:r>
-            <a:endParaRPr lang="en-US" sz="1500" dirty="0"/>
-          </a:p>
-        </p:txBody>
-      </p:sp>
-      <p:sp>
-        <p:nvSpPr>
-          <p:cNvPr id="25" name="Text 23"/>
-          <p:cNvSpPr txBox="1"/>
-          <p:nvPr/>
-        </p:nvSpPr>
-        <p:spPr>
-          <a:xfrm>
-            <a:off x="8292389" y="2706624"/>
-            <a:ext cx="3039770" cy="237744"/>
+            <a:endParaRPr lang="en-US" sz="1600" dirty="0"/>
+          </a:p>
+        </p:txBody>
+      </p:sp>
+      <p:sp>
+        <p:nvSpPr>
+          <p:cNvPr id="23" name="Text 21"/>
+          <p:cNvSpPr txBox="1"/>
+          <p:nvPr/>
+        </p:nvSpPr>
+        <p:spPr>
+          <a:xfrm>
+            <a:off x="8292389" y="2852928"/>
+            <a:ext cx="3039770" cy="768096"/>
           </a:xfrm>
           <a:prstGeom prst="rect">
             <a:avLst/>
@@ -8336,52 +8219,13 @@
           <a:lstStyle/>
           <a:p>
             <a:pPr indent="0" marL="0">
-              <a:buNone/>
-            </a:pPr>
-            <a:r>
-              <a:rPr lang="en-US" sz="1000" i="1" dirty="0">
-                <a:solidFill>
-                  <a:srgbClr val="87D4C7"/>
-                </a:solidFill>
-                <a:latin typeface="Calibri" pitchFamily="34" charset="0"/>
-                <a:ea typeface="Calibri" pitchFamily="34" charset="-122"/>
-                <a:cs typeface="Calibri" pitchFamily="34" charset="-120"/>
-              </a:rPr>
-              <a:t>Parker (1998)</a:t>
-            </a:r>
-            <a:endParaRPr lang="en-US" sz="1000" dirty="0"/>
-          </a:p>
-        </p:txBody>
-      </p:sp>
-      <p:sp>
-        <p:nvSpPr>
-          <p:cNvPr id="26" name="Text 24"/>
-          <p:cNvSpPr txBox="1"/>
-          <p:nvPr/>
-        </p:nvSpPr>
-        <p:spPr>
-          <a:xfrm>
-            <a:off x="8292389" y="2980944"/>
-            <a:ext cx="3039770" cy="640080"/>
-          </a:xfrm>
-          <a:prstGeom prst="rect">
-            <a:avLst/>
-          </a:prstGeom>
-          <a:noFill/>
-          <a:ln/>
-        </p:spPr>
-        <p:txBody>
-          <a:bodyPr wrap="square" lIns="0" tIns="0" rIns="0" bIns="0" rtlCol="0" anchor="t"/>
-          <a:lstStyle/>
-          <a:p>
-            <a:pPr indent="0" marL="0">
               <a:lnSpc>
-                <a:spcPts val="1500"/>
+                <a:spcPts val="1600"/>
               </a:lnSpc>
               <a:buNone/>
             </a:pPr>
             <a:r>
-              <a:rPr lang="en-US" sz="1100" dirty="0">
+              <a:rPr lang="en-US" sz="1150" dirty="0">
                 <a:solidFill>
                   <a:srgbClr val="E8E4DC"/>
                 </a:solidFill>
@@ -8391,13 +8235,13 @@
               </a:rPr>
               <a:t>Etikawan memvonis tindakan orang lain tanpa mengalami situasinya.</a:t>
             </a:r>
-            <a:endParaRPr lang="en-US" sz="1100" dirty="0"/>
-          </a:p>
-        </p:txBody>
-      </p:sp>
-      <p:sp>
-        <p:nvSpPr>
-          <p:cNvPr id="27" name="Shape 25"/>
+            <a:endParaRPr lang="en-US" sz="1150" dirty="0"/>
+          </a:p>
+        </p:txBody>
+      </p:sp>
+      <p:sp>
+        <p:nvSpPr>
+          <p:cNvPr id="24" name="Shape 22"/>
           <p:cNvSpPr/>
           <p:nvPr/>
         </p:nvSpPr>
@@ -8419,7 +8263,7 @@
       </p:sp>
       <p:sp>
         <p:nvSpPr>
-          <p:cNvPr id="28" name="Shape 26"/>
+          <p:cNvPr id="25" name="Shape 23"/>
           <p:cNvSpPr/>
           <p:nvPr/>
         </p:nvSpPr>
@@ -8441,7 +8285,7 @@
       </p:sp>
       <p:sp>
         <p:nvSpPr>
-          <p:cNvPr id="29" name="Text 27"/>
+          <p:cNvPr id="26" name="Text 24"/>
           <p:cNvSpPr txBox="1"/>
           <p:nvPr/>
         </p:nvSpPr>
@@ -8480,14 +8324,14 @@
       </p:sp>
       <p:sp>
         <p:nvSpPr>
-          <p:cNvPr id="30" name="Text 28"/>
-          <p:cNvSpPr txBox="1"/>
-          <p:nvPr/>
-        </p:nvSpPr>
-        <p:spPr>
-          <a:xfrm>
-            <a:off x="859536" y="4572000"/>
-            <a:ext cx="3039770" cy="274320"/>
+          <p:cNvPr id="27" name="Text 25"/>
+          <p:cNvSpPr txBox="1"/>
+          <p:nvPr/>
+        </p:nvSpPr>
+        <p:spPr>
+          <a:xfrm>
+            <a:off x="859536" y="4590288"/>
+            <a:ext cx="3039770" cy="292608"/>
           </a:xfrm>
           <a:prstGeom prst="rect">
             <a:avLst/>
@@ -8503,7 +8347,7 @@
               <a:buNone/>
             </a:pPr>
             <a:r>
-              <a:rPr lang="en-US" sz="1500" b="1" dirty="0">
+              <a:rPr lang="en-US" sz="1600" b="1" dirty="0">
                 <a:solidFill>
                   <a:srgbClr val="0E1626"/>
                 </a:solidFill>
@@ -8513,20 +8357,20 @@
               </a:rPr>
               <a:t>Too Impersonal</a:t>
             </a:r>
-            <a:endParaRPr lang="en-US" sz="1500" dirty="0"/>
-          </a:p>
-        </p:txBody>
-      </p:sp>
-      <p:sp>
-        <p:nvSpPr>
-          <p:cNvPr id="31" name="Text 29"/>
-          <p:cNvSpPr txBox="1"/>
-          <p:nvPr/>
-        </p:nvSpPr>
-        <p:spPr>
-          <a:xfrm>
-            <a:off x="859536" y="4846320"/>
-            <a:ext cx="3039770" cy="237744"/>
+            <a:endParaRPr lang="en-US" sz="1600" dirty="0"/>
+          </a:p>
+        </p:txBody>
+      </p:sp>
+      <p:sp>
+        <p:nvSpPr>
+          <p:cNvPr id="28" name="Text 26"/>
+          <p:cNvSpPr txBox="1"/>
+          <p:nvPr/>
+        </p:nvSpPr>
+        <p:spPr>
+          <a:xfrm>
+            <a:off x="859536" y="4992624"/>
+            <a:ext cx="3039770" cy="768096"/>
           </a:xfrm>
           <a:prstGeom prst="rect">
             <a:avLst/>
@@ -8539,52 +8383,13 @@
           <a:lstStyle/>
           <a:p>
             <a:pPr indent="0" marL="0">
-              <a:buNone/>
-            </a:pPr>
-            <a:r>
-              <a:rPr lang="en-US" sz="1000" i="1" dirty="0">
-                <a:solidFill>
-                  <a:srgbClr val="826724"/>
-                </a:solidFill>
-                <a:latin typeface="Calibri" pitchFamily="34" charset="0"/>
-                <a:ea typeface="Calibri" pitchFamily="34" charset="-122"/>
-                <a:cs typeface="Calibri" pitchFamily="34" charset="-120"/>
-              </a:rPr>
-              <a:t>Held (2006)</a:t>
-            </a:r>
-            <a:endParaRPr lang="en-US" sz="1000" dirty="0"/>
-          </a:p>
-        </p:txBody>
-      </p:sp>
-      <p:sp>
-        <p:nvSpPr>
-          <p:cNvPr id="32" name="Text 30"/>
-          <p:cNvSpPr txBox="1"/>
-          <p:nvPr/>
-        </p:nvSpPr>
-        <p:spPr>
-          <a:xfrm>
-            <a:off x="859536" y="5120640"/>
-            <a:ext cx="3039770" cy="640080"/>
-          </a:xfrm>
-          <a:prstGeom prst="rect">
-            <a:avLst/>
-          </a:prstGeom>
-          <a:noFill/>
-          <a:ln/>
-        </p:spPr>
-        <p:txBody>
-          <a:bodyPr wrap="square" lIns="0" tIns="0" rIns="0" bIns="0" rtlCol="0" anchor="t"/>
-          <a:lstStyle/>
-          <a:p>
-            <a:pPr indent="0" marL="0">
               <a:lnSpc>
-                <a:spcPts val="1500"/>
+                <a:spcPts val="1600"/>
               </a:lnSpc>
               <a:buNone/>
             </a:pPr>
             <a:r>
-              <a:rPr lang="en-US" sz="1100" dirty="0">
+              <a:rPr lang="en-US" sz="1150" dirty="0">
                 <a:solidFill>
                   <a:srgbClr val="2A3243"/>
                 </a:solidFill>
@@ -8594,13 +8399,13 @@
               </a:rPr>
               <a:t>Prinsip abstrak mengabaikan ikatan personal yang membentuk perasaan moral.</a:t>
             </a:r>
-            <a:endParaRPr lang="en-US" sz="1100" dirty="0"/>
-          </a:p>
-        </p:txBody>
-      </p:sp>
-      <p:sp>
-        <p:nvSpPr>
-          <p:cNvPr id="33" name="Shape 31"/>
+            <a:endParaRPr lang="en-US" sz="1150" dirty="0"/>
+          </a:p>
+        </p:txBody>
+      </p:sp>
+      <p:sp>
+        <p:nvSpPr>
+          <p:cNvPr id="29" name="Shape 27"/>
           <p:cNvSpPr/>
           <p:nvPr/>
         </p:nvSpPr>
@@ -8622,7 +8427,7 @@
       </p:sp>
       <p:sp>
         <p:nvSpPr>
-          <p:cNvPr id="34" name="Shape 32"/>
+          <p:cNvPr id="30" name="Shape 28"/>
           <p:cNvSpPr/>
           <p:nvPr/>
         </p:nvSpPr>
@@ -8644,7 +8449,7 @@
       </p:sp>
       <p:sp>
         <p:nvSpPr>
-          <p:cNvPr id="35" name="Text 33"/>
+          <p:cNvPr id="31" name="Text 29"/>
           <p:cNvSpPr txBox="1"/>
           <p:nvPr/>
         </p:nvSpPr>
@@ -8683,14 +8488,14 @@
       </p:sp>
       <p:sp>
         <p:nvSpPr>
-          <p:cNvPr id="36" name="Text 34"/>
-          <p:cNvSpPr txBox="1"/>
-          <p:nvPr/>
-        </p:nvSpPr>
-        <p:spPr>
-          <a:xfrm>
-            <a:off x="4575962" y="4572000"/>
-            <a:ext cx="3039770" cy="274320"/>
+          <p:cNvPr id="32" name="Text 30"/>
+          <p:cNvSpPr txBox="1"/>
+          <p:nvPr/>
+        </p:nvSpPr>
+        <p:spPr>
+          <a:xfrm>
+            <a:off x="4575962" y="4590288"/>
+            <a:ext cx="3039770" cy="292608"/>
           </a:xfrm>
           <a:prstGeom prst="rect">
             <a:avLst/>
@@ -8706,7 +8511,7 @@
               <a:buNone/>
             </a:pPr>
             <a:r>
-              <a:rPr lang="en-US" sz="1500" b="1" dirty="0">
+              <a:rPr lang="en-US" sz="1600" b="1" dirty="0">
                 <a:solidFill>
                   <a:srgbClr val="0E1626"/>
                 </a:solidFill>
@@ -8716,20 +8521,20 @@
               </a:rPr>
               <a:t>Too Codified</a:t>
             </a:r>
-            <a:endParaRPr lang="en-US" sz="1500" dirty="0"/>
-          </a:p>
-        </p:txBody>
-      </p:sp>
-      <p:sp>
-        <p:nvSpPr>
-          <p:cNvPr id="37" name="Text 35"/>
-          <p:cNvSpPr txBox="1"/>
-          <p:nvPr/>
-        </p:nvSpPr>
-        <p:spPr>
-          <a:xfrm>
-            <a:off x="4575962" y="4846320"/>
-            <a:ext cx="3039770" cy="237744"/>
+            <a:endParaRPr lang="en-US" sz="1600" dirty="0"/>
+          </a:p>
+        </p:txBody>
+      </p:sp>
+      <p:sp>
+        <p:nvSpPr>
+          <p:cNvPr id="33" name="Text 31"/>
+          <p:cNvSpPr txBox="1"/>
+          <p:nvPr/>
+        </p:nvSpPr>
+        <p:spPr>
+          <a:xfrm>
+            <a:off x="4575962" y="4992624"/>
+            <a:ext cx="3039770" cy="768096"/>
           </a:xfrm>
           <a:prstGeom prst="rect">
             <a:avLst/>
@@ -8742,52 +8547,13 @@
           <a:lstStyle/>
           <a:p>
             <a:pPr indent="0" marL="0">
-              <a:buNone/>
-            </a:pPr>
-            <a:r>
-              <a:rPr lang="en-US" sz="1000" i="1" dirty="0">
-                <a:solidFill>
-                  <a:srgbClr val="6A8338"/>
-                </a:solidFill>
-                <a:latin typeface="Calibri" pitchFamily="34" charset="0"/>
-                <a:ea typeface="Calibri" pitchFamily="34" charset="-122"/>
-                <a:cs typeface="Calibri" pitchFamily="34" charset="-120"/>
-              </a:rPr>
-              <a:t>Bauman (1993), Rorty (2006)</a:t>
-            </a:r>
-            <a:endParaRPr lang="en-US" sz="1000" dirty="0"/>
-          </a:p>
-        </p:txBody>
-      </p:sp>
-      <p:sp>
-        <p:nvSpPr>
-          <p:cNvPr id="38" name="Text 36"/>
-          <p:cNvSpPr txBox="1"/>
-          <p:nvPr/>
-        </p:nvSpPr>
-        <p:spPr>
-          <a:xfrm>
-            <a:off x="4575962" y="5120640"/>
-            <a:ext cx="3039770" cy="640080"/>
-          </a:xfrm>
-          <a:prstGeom prst="rect">
-            <a:avLst/>
-          </a:prstGeom>
-          <a:noFill/>
-          <a:ln/>
-        </p:spPr>
-        <p:txBody>
-          <a:bodyPr wrap="square" lIns="0" tIns="0" rIns="0" bIns="0" rtlCol="0" anchor="t"/>
-          <a:lstStyle/>
-          <a:p>
-            <a:pPr indent="0" marL="0">
               <a:lnSpc>
-                <a:spcPts val="1500"/>
+                <a:spcPts val="1600"/>
               </a:lnSpc>
               <a:buNone/>
             </a:pPr>
             <a:r>
-              <a:rPr lang="en-US" sz="1100" dirty="0">
+              <a:rPr lang="en-US" sz="1150" dirty="0">
                 <a:solidFill>
                   <a:srgbClr val="2A3243"/>
                 </a:solidFill>
@@ -8797,13 +8563,13 @@
               </a:rPr>
               <a:t>Aturan terkodifikasi menekan otonomi dan merendahkan emosi moral.</a:t>
             </a:r>
-            <a:endParaRPr lang="en-US" sz="1100" dirty="0"/>
-          </a:p>
-        </p:txBody>
-      </p:sp>
-      <p:sp>
-        <p:nvSpPr>
-          <p:cNvPr id="39" name="Shape 37"/>
+            <a:endParaRPr lang="en-US" sz="1150" dirty="0"/>
+          </a:p>
+        </p:txBody>
+      </p:sp>
+      <p:sp>
+        <p:nvSpPr>
+          <p:cNvPr id="34" name="Shape 32"/>
           <p:cNvSpPr/>
           <p:nvPr/>
         </p:nvSpPr>
@@ -8825,7 +8591,7 @@
       </p:sp>
       <p:sp>
         <p:nvSpPr>
-          <p:cNvPr id="40" name="Shape 38"/>
+          <p:cNvPr id="35" name="Shape 33"/>
           <p:cNvSpPr/>
           <p:nvPr/>
         </p:nvSpPr>
@@ -8847,7 +8613,7 @@
       </p:sp>
       <p:sp>
         <p:nvSpPr>
-          <p:cNvPr id="41" name="Text 39"/>
+          <p:cNvPr id="36" name="Text 34"/>
           <p:cNvSpPr txBox="1"/>
           <p:nvPr/>
         </p:nvSpPr>
@@ -8886,14 +8652,14 @@
       </p:sp>
       <p:sp>
         <p:nvSpPr>
-          <p:cNvPr id="42" name="Text 40"/>
-          <p:cNvSpPr txBox="1"/>
-          <p:nvPr/>
-        </p:nvSpPr>
-        <p:spPr>
-          <a:xfrm>
-            <a:off x="8292389" y="4572000"/>
-            <a:ext cx="3039770" cy="274320"/>
+          <p:cNvPr id="37" name="Text 35"/>
+          <p:cNvSpPr txBox="1"/>
+          <p:nvPr/>
+        </p:nvSpPr>
+        <p:spPr>
+          <a:xfrm>
+            <a:off x="8292389" y="4590288"/>
+            <a:ext cx="3039770" cy="292608"/>
           </a:xfrm>
           <a:prstGeom prst="rect">
             <a:avLst/>
@@ -8909,7 +8675,7 @@
               <a:buNone/>
             </a:pPr>
             <a:r>
-              <a:rPr lang="en-US" sz="1500" b="1" dirty="0">
+              <a:rPr lang="en-US" sz="1600" b="1" dirty="0">
                 <a:solidFill>
                   <a:srgbClr val="FFFFFF"/>
                 </a:solidFill>
@@ -8919,20 +8685,20 @@
               </a:rPr>
               <a:t>Too Imperialist</a:t>
             </a:r>
-            <a:endParaRPr lang="en-US" sz="1500" dirty="0"/>
-          </a:p>
-        </p:txBody>
-      </p:sp>
-      <p:sp>
-        <p:nvSpPr>
-          <p:cNvPr id="43" name="Text 41"/>
-          <p:cNvSpPr txBox="1"/>
-          <p:nvPr/>
-        </p:nvSpPr>
-        <p:spPr>
-          <a:xfrm>
-            <a:off x="8292389" y="4846320"/>
-            <a:ext cx="3039770" cy="237744"/>
+            <a:endParaRPr lang="en-US" sz="1600" dirty="0"/>
+          </a:p>
+        </p:txBody>
+      </p:sp>
+      <p:sp>
+        <p:nvSpPr>
+          <p:cNvPr id="38" name="Text 36"/>
+          <p:cNvSpPr txBox="1"/>
+          <p:nvPr/>
+        </p:nvSpPr>
+        <p:spPr>
+          <a:xfrm>
+            <a:off x="8292389" y="4992624"/>
+            <a:ext cx="3039770" cy="768096"/>
           </a:xfrm>
           <a:prstGeom prst="rect">
             <a:avLst/>
@@ -8945,52 +8711,13 @@
           <a:lstStyle/>
           <a:p>
             <a:pPr indent="0" marL="0">
-              <a:buNone/>
-            </a:pPr>
-            <a:r>
-              <a:rPr lang="en-US" sz="1000" i="1" dirty="0">
-                <a:solidFill>
-                  <a:srgbClr val="878B93"/>
-                </a:solidFill>
-                <a:latin typeface="Calibri" pitchFamily="34" charset="0"/>
-                <a:ea typeface="Calibri" pitchFamily="34" charset="-122"/>
-                <a:cs typeface="Calibri" pitchFamily="34" charset="-120"/>
-              </a:rPr>
-              <a:t>Naude (2017)</a:t>
-            </a:r>
-            <a:endParaRPr lang="en-US" sz="1000" dirty="0"/>
-          </a:p>
-        </p:txBody>
-      </p:sp>
-      <p:sp>
-        <p:nvSpPr>
-          <p:cNvPr id="44" name="Text 42"/>
-          <p:cNvSpPr txBox="1"/>
-          <p:nvPr/>
-        </p:nvSpPr>
-        <p:spPr>
-          <a:xfrm>
-            <a:off x="8292389" y="5120640"/>
-            <a:ext cx="3039770" cy="640080"/>
-          </a:xfrm>
-          <a:prstGeom prst="rect">
-            <a:avLst/>
-          </a:prstGeom>
-          <a:noFill/>
-          <a:ln/>
-        </p:spPr>
-        <p:txBody>
-          <a:bodyPr wrap="square" lIns="0" tIns="0" rIns="0" bIns="0" rtlCol="0" anchor="t"/>
-          <a:lstStyle/>
-          <a:p>
-            <a:pPr indent="0" marL="0">
               <a:lnSpc>
-                <a:spcPts val="1500"/>
+                <a:spcPts val="1600"/>
               </a:lnSpc>
               <a:buNone/>
             </a:pPr>
             <a:r>
-              <a:rPr lang="en-US" sz="1100" dirty="0">
+              <a:rPr lang="en-US" sz="1150" dirty="0">
                 <a:solidFill>
                   <a:srgbClr val="E8E4DC"/>
                 </a:solidFill>
@@ -9000,7 +8727,7 @@
               </a:rPr>
               <a:t>Tidak terdapat dasar untuk mengasumsikan universalitas teori Barat.</a:t>
             </a:r>
-            <a:endParaRPr lang="en-US" sz="1100" dirty="0"/>
+            <a:endParaRPr lang="en-US" sz="1150" dirty="0"/>
           </a:p>
         </p:txBody>
       </p:sp>
@@ -9065,7 +8792,7 @@
         <p:spPr>
           <a:xfrm>
             <a:off x="621792" y="457200"/>
-            <a:ext cx="1777594" cy="283464"/>
+            <a:ext cx="1234440" cy="283464"/>
           </a:xfrm>
           <a:prstGeom prst="roundRect">
             <a:avLst>
@@ -9092,46 +8819,46 @@
         <p:spPr>
           <a:xfrm>
             <a:off x="621792" y="457200"/>
+            <a:ext cx="1234440" cy="283464"/>
+          </a:xfrm>
+          <a:prstGeom prst="rect">
+            <a:avLst/>
+          </a:prstGeom>
+          <a:noFill/>
+          <a:ln/>
+        </p:spPr>
+        <p:txBody>
+          <a:bodyPr wrap="square" lIns="0" tIns="0" rIns="0" bIns="0" rtlCol="0" anchor="ctr"/>
+          <a:lstStyle/>
+          <a:p>
+            <a:pPr algn="ctr" indent="0" marL="0">
+              <a:buNone/>
+            </a:pPr>
+            <a:r>
+              <a:rPr lang="en-US" sz="950" b="1" spc="110" kern="0" dirty="0">
+                <a:solidFill>
+                  <a:srgbClr val="0E1626"/>
+                </a:solidFill>
+                <a:latin typeface="Calibri" pitchFamily="34" charset="0"/>
+                <a:ea typeface="Calibri" pitchFamily="34" charset="-122"/>
+                <a:cs typeface="Calibri" pitchFamily="34" charset="-120"/>
+              </a:rPr>
+              <a:t>ALTERNATIF</a:t>
+            </a:r>
+            <a:endParaRPr lang="en-US" sz="950" dirty="0"/>
+          </a:p>
+        </p:txBody>
+      </p:sp>
+      <p:sp>
+        <p:nvSpPr>
+          <p:cNvPr id="5" name="Shape 3"/>
+          <p:cNvSpPr/>
+          <p:nvPr/>
+        </p:nvSpPr>
+        <p:spPr>
+          <a:xfrm>
+            <a:off x="1975104" y="457200"/>
             <a:ext cx="1777594" cy="283464"/>
-          </a:xfrm>
-          <a:prstGeom prst="rect">
-            <a:avLst/>
-          </a:prstGeom>
-          <a:noFill/>
-          <a:ln/>
-        </p:spPr>
-        <p:txBody>
-          <a:bodyPr wrap="square" lIns="0" tIns="0" rIns="0" bIns="0" rtlCol="0" anchor="ctr"/>
-          <a:lstStyle/>
-          <a:p>
-            <a:pPr algn="ctr" indent="0" marL="0">
-              <a:buNone/>
-            </a:pPr>
-            <a:r>
-              <a:rPr lang="en-US" sz="950" b="1" spc="110" kern="0" dirty="0">
-                <a:solidFill>
-                  <a:srgbClr val="0E1626"/>
-                </a:solidFill>
-                <a:latin typeface="Calibri" pitchFamily="34" charset="0"/>
-                <a:ea typeface="Calibri" pitchFamily="34" charset="-122"/>
-                <a:cs typeface="Calibri" pitchFamily="34" charset="-120"/>
-              </a:rPr>
-              <a:t>EMPAT ALTERNATIF</a:t>
-            </a:r>
-            <a:endParaRPr lang="en-US" sz="950" dirty="0"/>
-          </a:p>
-        </p:txBody>
-      </p:sp>
-      <p:sp>
-        <p:nvSpPr>
-          <p:cNvPr id="5" name="Shape 3"/>
-          <p:cNvSpPr/>
-          <p:nvPr/>
-        </p:nvSpPr>
-        <p:spPr>
-          <a:xfrm>
-            <a:off x="2518258" y="457200"/>
-            <a:ext cx="1687068" cy="283464"/>
           </a:xfrm>
           <a:prstGeom prst="roundRect">
             <a:avLst>
@@ -9157,8 +8884,8 @@
         </p:nvSpPr>
         <p:spPr>
           <a:xfrm>
-            <a:off x="2518258" y="457200"/>
-            <a:ext cx="1687068" cy="283464"/>
+            <a:off x="1975104" y="457200"/>
+            <a:ext cx="1777594" cy="283464"/>
           </a:xfrm>
           <a:prstGeom prst="rect">
             <a:avLst/>
@@ -9182,7 +8909,7 @@
                 <a:ea typeface="Calibri" pitchFamily="34" charset="-122"/>
                 <a:cs typeface="Calibri" pitchFamily="34" charset="-120"/>
               </a:rPr>
-              <a:t>HALAMAN 110–118</a:t>
+              <a:t>EMPAT PERSPEKTIF</a:t>
             </a:r>
             <a:endParaRPr lang="en-US" sz="950" dirty="0"/>
           </a:p>
@@ -10394,7 +10121,7 @@
                 <a:ea typeface="Calibri" pitchFamily="34" charset="-122"/>
                 <a:cs typeface="Calibri" pitchFamily="34" charset="-120"/>
               </a:rPr>
-              <a:t>FIGURE 3.1 &amp; 3.2</a:t>
+              <a:t>LENSA DAN PRISMA</a:t>
             </a:r>
             <a:endParaRPr lang="en-US" sz="950" dirty="0"/>
           </a:p>
@@ -10534,7 +10261,7 @@
                 <a:ea typeface="Calibri" pitchFamily="34" charset="-122"/>
                 <a:cs typeface="Calibri" pitchFamily="34" charset="-120"/>
               </a:rPr>
-              <a:t>Crane et al. (2019) tidak menetapkan satu teori sebagai yang paling sahih.</a:t>
+              <a:t>Tidak ada satu teori yang ditetapkan sebagai pandangan paling sahih.</a:t>
             </a:r>
             <a:endParaRPr lang="en-US" sz="1350" dirty="0"/>
           </a:p>
@@ -10600,7 +10327,7 @@
                 <a:ea typeface="Calibri" pitchFamily="34" charset="-122"/>
                 <a:cs typeface="Calibri" pitchFamily="34" charset="-120"/>
               </a:rPr>
-              <a:t>FIGURE 3.1</a:t>
+              <a:t>PENDEKATAN TUNGGAL</a:t>
             </a:r>
             <a:endParaRPr lang="en-US" sz="950" dirty="0"/>
           </a:p>
@@ -10801,7 +10528,7 @@
                 <a:ea typeface="Calibri" pitchFamily="34" charset="-122"/>
                 <a:cs typeface="Calibri" pitchFamily="34" charset="-120"/>
               </a:rPr>
-              <a:t>FIGURE 3.2</a:t>
+              <a:t>PENDEKATAN JAMAK</a:t>
             </a:r>
             <a:endParaRPr lang="en-US" sz="950" dirty="0"/>
           </a:p>
@@ -12297,7 +12024,7 @@
         <p:spPr>
           <a:xfrm>
             <a:off x="1884578" y="2011680"/>
-            <a:ext cx="2501798" cy="283464"/>
+            <a:ext cx="1324966" cy="283464"/>
           </a:xfrm>
           <a:prstGeom prst="roundRect">
             <a:avLst>
@@ -12324,7 +12051,7 @@
         <p:spPr>
           <a:xfrm>
             <a:off x="1884578" y="2011680"/>
-            <a:ext cx="2501798" cy="283464"/>
+            <a:ext cx="1324966" cy="283464"/>
           </a:xfrm>
           <a:prstGeom prst="rect">
             <a:avLst/>
@@ -12348,7 +12075,7 @@
                 <a:ea typeface="Calibri" pitchFamily="34" charset="-122"/>
                 <a:cs typeface="Calibri" pitchFamily="34" charset="-120"/>
               </a:rPr>
-              <a:t>CASE 3 · HALAMAN 129–134</a:t>
+              <a:t>STUDI KASUS</a:t>
             </a:r>
             <a:endParaRPr lang="en-US" sz="950" dirty="0"/>
           </a:p>
@@ -12762,7 +12489,7 @@
         <p:spPr>
           <a:xfrm>
             <a:off x="1522476" y="457200"/>
-            <a:ext cx="1687068" cy="283464"/>
+            <a:ext cx="1506017" cy="283464"/>
           </a:xfrm>
           <a:prstGeom prst="roundRect">
             <a:avLst>
@@ -12789,7 +12516,7 @@
         <p:spPr>
           <a:xfrm>
             <a:off x="1522476" y="457200"/>
-            <a:ext cx="1687068" cy="283464"/>
+            <a:ext cx="1506017" cy="283464"/>
           </a:xfrm>
           <a:prstGeom prst="rect">
             <a:avLst/>
@@ -12813,7 +12540,7 @@
                 <a:ea typeface="Calibri" pitchFamily="34" charset="-122"/>
                 <a:cs typeface="Calibri" pitchFamily="34" charset="-120"/>
               </a:rPr>
-              <a:t>HALAMAN 130–131</a:t>
+              <a:t>DATA DUA SISI</a:t>
             </a:r>
             <a:endParaRPr lang="en-US" sz="950" dirty="0"/>
           </a:p>
@@ -14577,7 +14304,7 @@
                 <a:ea typeface="Calibri" pitchFamily="34" charset="-122"/>
                 <a:cs typeface="Calibri" pitchFamily="34" charset="-120"/>
               </a:rPr>
-              <a:t>Cadangan terbukti terbesar 2017, miliar barel · Tabel 3.9</a:t>
+              <a:t>Cadangan minyak terbukti terbesar, miliar barel, 2017</a:t>
             </a:r>
             <a:endParaRPr lang="en-US" sz="950" dirty="0"/>
           </a:p>
@@ -18477,7 +18204,7 @@
                 <a:ea typeface="Calibri" pitchFamily="34" charset="-122"/>
                 <a:cs typeface="Calibri" pitchFamily="34" charset="-120"/>
               </a:rPr>
-              <a:t>Pesan utama Chapter 3</a:t>
+              <a:t>Pendekatan pluralis yang dianjurkan</a:t>
             </a:r>
             <a:endParaRPr lang="en-US" sz="1150" dirty="0"/>
           </a:p>
@@ -20783,7 +20510,7 @@
                 <a:ea typeface="Calibri" pitchFamily="34" charset="-122"/>
                 <a:cs typeface="Calibri" pitchFamily="34" charset="-120"/>
               </a:rPr>
-              <a:t>Kesembilan teori tidak menghasilkan satu jawaban tunggal. Ketiadaan jawaban tunggal itulah pesan Figure 3.2.</a:t>
+              <a:t>Kesembilan teori tidak menghasilkan satu jawaban tunggal. Ketiadaan jawaban tunggal itulah pesan utamanya.</a:t>
             </a:r>
             <a:endParaRPr lang="en-US" sz="1500" dirty="0"/>
           </a:p>
@@ -20962,7 +20689,7 @@
                 <a:ea typeface="Calibri" pitchFamily="34" charset="-122"/>
                 <a:cs typeface="Calibri" pitchFamily="34" charset="-120"/>
               </a:rPr>
-              <a:t>Business Ethics · Chapter 3 Evaluating Business Ethics</a:t>
+              <a:t>Business Ethics · Evaluating Business Ethics</a:t>
             </a:r>
             <a:endParaRPr lang="en-US" sz="1050" dirty="0"/>
           </a:p>
@@ -21001,7 +20728,7 @@
                 <a:ea typeface="Calibri" pitchFamily="34" charset="-122"/>
                 <a:cs typeface="Calibri" pitchFamily="34" charset="-120"/>
               </a:rPr>
-              <a:t>Crane, Matten, Glozer &amp; Spence (2019) · Oxford University Press</a:t>
+              <a:t>MBA · Universitas Gadjah Mada</a:t>
             </a:r>
             <a:endParaRPr lang="en-US" sz="1050" dirty="0"/>
           </a:p>
@@ -21068,7 +20795,7 @@
         <p:spPr>
           <a:xfrm>
             <a:off x="621792" y="457200"/>
-            <a:ext cx="1324966" cy="283464"/>
+            <a:ext cx="962863" cy="283464"/>
           </a:xfrm>
           <a:prstGeom prst="roundRect">
             <a:avLst>
@@ -21095,7 +20822,7 @@
         <p:spPr>
           <a:xfrm>
             <a:off x="621792" y="457200"/>
-            <a:ext cx="1324966" cy="283464"/>
+            <a:ext cx="962863" cy="283464"/>
           </a:xfrm>
           <a:prstGeom prst="rect">
             <a:avLst/>
@@ -21119,7 +20846,7 @@
                 <a:ea typeface="Calibri" pitchFamily="34" charset="-122"/>
                 <a:cs typeface="Calibri" pitchFamily="34" charset="-120"/>
               </a:rPr>
-              <a:t>PERAN TEORI</a:t>
+              <a:t>FONDASI</a:t>
             </a:r>
             <a:endParaRPr lang="en-US" sz="950" dirty="0"/>
           </a:p>
@@ -21133,8 +20860,8 @@
         </p:nvSpPr>
         <p:spPr>
           <a:xfrm>
-            <a:off x="2065630" y="457200"/>
-            <a:ext cx="1506017" cy="283464"/>
+            <a:off x="1703527" y="457200"/>
+            <a:ext cx="2139696" cy="283464"/>
           </a:xfrm>
           <a:prstGeom prst="roundRect">
             <a:avLst>
@@ -21160,8 +20887,8 @@
         </p:nvSpPr>
         <p:spPr>
           <a:xfrm>
-            <a:off x="2065630" y="457200"/>
-            <a:ext cx="1506017" cy="283464"/>
+            <a:off x="1703527" y="457200"/>
+            <a:ext cx="2139696" cy="283464"/>
           </a:xfrm>
           <a:prstGeom prst="rect">
             <a:avLst/>
@@ -21185,7 +20912,7 @@
                 <a:ea typeface="Calibri" pitchFamily="34" charset="-122"/>
                 <a:cs typeface="Calibri" pitchFamily="34" charset="-120"/>
               </a:rPr>
-              <a:t>HALAMAN 86–88</a:t>
+              <a:t>DASAR PENALARAN ETIS</a:t>
             </a:r>
             <a:endParaRPr lang="en-US" sz="950" dirty="0"/>
           </a:p>
@@ -21340,11 +21067,11 @@
         <p:spPr>
           <a:xfrm>
             <a:off x="621792" y="1975104"/>
-            <a:ext cx="3503066" cy="2139696"/>
+            <a:ext cx="3503066" cy="2450592"/>
           </a:xfrm>
           <a:prstGeom prst="roundRect">
             <a:avLst>
-              <a:gd name="adj" fmla="val 6838"/>
+              <a:gd name="adj" fmla="val 5970"/>
             </a:avLst>
           </a:prstGeom>
           <a:solidFill>
@@ -21465,7 +21192,7 @@
         <p:spPr>
           <a:xfrm>
             <a:off x="859536" y="2926080"/>
-            <a:ext cx="3027578" cy="1060704"/>
+            <a:ext cx="3027578" cy="1371600"/>
           </a:xfrm>
           <a:prstGeom prst="rect">
             <a:avLst/>
@@ -21507,11 +21234,11 @@
         <p:spPr>
           <a:xfrm>
             <a:off x="4344314" y="1975104"/>
-            <a:ext cx="3503066" cy="2139696"/>
+            <a:ext cx="3503066" cy="2450592"/>
           </a:xfrm>
           <a:prstGeom prst="roundRect">
             <a:avLst>
-              <a:gd name="adj" fmla="val 6838"/>
+              <a:gd name="adj" fmla="val 5970"/>
             </a:avLst>
           </a:prstGeom>
           <a:solidFill>
@@ -21632,7 +21359,7 @@
         <p:spPr>
           <a:xfrm>
             <a:off x="4582058" y="2926080"/>
-            <a:ext cx="3027578" cy="1060704"/>
+            <a:ext cx="3027578" cy="1371600"/>
           </a:xfrm>
           <a:prstGeom prst="rect">
             <a:avLst/>
@@ -21674,11 +21401,11 @@
         <p:spPr>
           <a:xfrm>
             <a:off x="8066837" y="1975104"/>
-            <a:ext cx="3503066" cy="2139696"/>
+            <a:ext cx="3503066" cy="2450592"/>
           </a:xfrm>
           <a:prstGeom prst="roundRect">
             <a:avLst>
-              <a:gd name="adj" fmla="val 6838"/>
+              <a:gd name="adj" fmla="val 5970"/>
             </a:avLst>
           </a:prstGeom>
           <a:solidFill>
@@ -21799,7 +21526,7 @@
         <p:spPr>
           <a:xfrm>
             <a:off x="8304581" y="2926080"/>
-            <a:ext cx="3027578" cy="1060704"/>
+            <a:ext cx="3027578" cy="1371600"/>
           </a:xfrm>
           <a:prstGeom prst="rect">
             <a:avLst/>
@@ -21840,12 +21567,12 @@
         </p:nvSpPr>
         <p:spPr>
           <a:xfrm>
-            <a:off x="621792" y="4297680"/>
-            <a:ext cx="10948111" cy="1517904"/>
+            <a:off x="621792" y="4718304"/>
+            <a:ext cx="10948111" cy="969264"/>
           </a:xfrm>
           <a:prstGeom prst="roundRect">
             <a:avLst>
-              <a:gd name="adj" fmla="val 9639"/>
+              <a:gd name="adj" fmla="val 15094"/>
             </a:avLst>
           </a:prstGeom>
           <a:solidFill>
@@ -21862,8 +21589,8 @@
         </p:nvSpPr>
         <p:spPr>
           <a:xfrm>
-            <a:off x="621792" y="4352544"/>
-            <a:ext cx="50292" cy="1408176"/>
+            <a:off x="621792" y="4773168"/>
+            <a:ext cx="50292" cy="859536"/>
           </a:xfrm>
           <a:prstGeom prst="rect">
             <a:avLst/>
@@ -21882,17 +21609,17 @@
         </p:nvSpPr>
         <p:spPr>
           <a:xfrm>
-            <a:off x="896112" y="4462272"/>
-            <a:ext cx="10399471" cy="950976"/>
-          </a:xfrm>
-          <a:prstGeom prst="rect">
-            <a:avLst/>
-          </a:prstGeom>
-          <a:noFill/>
-          <a:ln/>
-        </p:spPr>
-        <p:txBody>
-          <a:bodyPr wrap="square" lIns="0" tIns="0" rIns="0" bIns="0" rtlCol="0" anchor="t"/>
+            <a:off x="896112" y="4809744"/>
+            <a:ext cx="10399471" cy="786384"/>
+          </a:xfrm>
+          <a:prstGeom prst="rect">
+            <a:avLst/>
+          </a:prstGeom>
+          <a:noFill/>
+          <a:ln/>
+        </p:spPr>
+        <p:txBody>
+          <a:bodyPr wrap="square" lIns="0" tIns="0" rIns="0" bIns="0" rtlCol="0" anchor="ctr"/>
           <a:lstStyle/>
           <a:p>
             <a:pPr indent="0" marL="0">
@@ -21913,45 +21640,6 @@
               <a:t>Normative ethical theories adalah aturan, prinsip, dan pendekatan yang menetapkan benar dan salahnya suatu tindakan.</a:t>
             </a:r>
             <a:endParaRPr lang="en-US" sz="1250" dirty="0"/>
-          </a:p>
-        </p:txBody>
-      </p:sp>
-      <p:sp>
-        <p:nvSpPr>
-          <p:cNvPr id="28" name="Text 26"/>
-          <p:cNvSpPr txBox="1"/>
-          <p:nvPr/>
-        </p:nvSpPr>
-        <p:spPr>
-          <a:xfrm>
-            <a:off x="896112" y="5431536"/>
-            <a:ext cx="10399471" cy="237744"/>
-          </a:xfrm>
-          <a:prstGeom prst="rect">
-            <a:avLst/>
-          </a:prstGeom>
-          <a:noFill/>
-          <a:ln/>
-        </p:spPr>
-        <p:txBody>
-          <a:bodyPr wrap="square" lIns="0" tIns="0" rIns="0" bIns="0" rtlCol="0" anchor="t"/>
-          <a:lstStyle/>
-          <a:p>
-            <a:pPr indent="0" marL="0">
-              <a:buNone/>
-            </a:pPr>
-            <a:r>
-              <a:rPr lang="en-US" sz="950" b="1" spc="100" kern="0" dirty="0">
-                <a:solidFill>
-                  <a:srgbClr val="6B7A90"/>
-                </a:solidFill>
-                <a:latin typeface="Calibri" pitchFamily="34" charset="0"/>
-                <a:ea typeface="Calibri" pitchFamily="34" charset="-122"/>
-                <a:cs typeface="Calibri" pitchFamily="34" charset="-120"/>
-              </a:rPr>
-              <a:t>CRANE ET AL. (2019) · HALAMAN 87</a:t>
-            </a:r>
-            <a:endParaRPr lang="en-US" sz="950" dirty="0"/>
           </a:p>
         </p:txBody>
       </p:sp>
@@ -22082,7 +21770,7 @@
         <p:spPr>
           <a:xfrm>
             <a:off x="2156155" y="457200"/>
-            <a:ext cx="1506017" cy="283464"/>
+            <a:ext cx="1596542" cy="283464"/>
           </a:xfrm>
           <a:prstGeom prst="roundRect">
             <a:avLst>
@@ -22109,7 +21797,7 @@
         <p:spPr>
           <a:xfrm>
             <a:off x="2156155" y="457200"/>
-            <a:ext cx="1506017" cy="283464"/>
+            <a:ext cx="1596542" cy="283464"/>
           </a:xfrm>
           <a:prstGeom prst="rect">
             <a:avLst/>
@@ -22133,7 +21821,7 @@
                 <a:ea typeface="Calibri" pitchFamily="34" charset="-122"/>
                 <a:cs typeface="Calibri" pitchFamily="34" charset="-120"/>
               </a:rPr>
-              <a:t>HALAMAN 89–91</a:t>
+              <a:t>TIGA PENDIRIAN</a:t>
             </a:r>
             <a:endParaRPr lang="en-US" sz="950" dirty="0"/>
           </a:p>
@@ -22273,7 +21961,7 @@
                 <a:ea typeface="Calibri" pitchFamily="34" charset="-122"/>
                 <a:cs typeface="Calibri" pitchFamily="34" charset="-120"/>
               </a:rPr>
-              <a:t>Crane et al. (2019) mengambil posisi ketiga.</a:t>
+              <a:t>Etika bisnis kontemporer berdiri pada posisi ketiga.</a:t>
             </a:r>
             <a:endParaRPr lang="en-US" sz="1350" dirty="0"/>
           </a:p>
@@ -22852,12 +22540,12 @@
         </p:nvSpPr>
         <p:spPr>
           <a:xfrm>
-            <a:off x="621792" y="5248656"/>
-            <a:ext cx="10948111" cy="859536"/>
+            <a:off x="621792" y="5303520"/>
+            <a:ext cx="10948111" cy="694944"/>
           </a:xfrm>
           <a:prstGeom prst="roundRect">
             <a:avLst>
-              <a:gd name="adj" fmla="val 17021"/>
+              <a:gd name="adj" fmla="val 21053"/>
             </a:avLst>
           </a:prstGeom>
           <a:solidFill>
@@ -22874,8 +22562,8 @@
         </p:nvSpPr>
         <p:spPr>
           <a:xfrm>
-            <a:off x="621792" y="5303520"/>
-            <a:ext cx="50292" cy="749808"/>
+            <a:off x="621792" y="5358384"/>
+            <a:ext cx="50292" cy="585216"/>
           </a:xfrm>
           <a:prstGeom prst="rect">
             <a:avLst/>
@@ -22894,17 +22582,17 @@
         </p:nvSpPr>
         <p:spPr>
           <a:xfrm>
-            <a:off x="896112" y="5413248"/>
-            <a:ext cx="10399471" cy="292608"/>
-          </a:xfrm>
-          <a:prstGeom prst="rect">
-            <a:avLst/>
-          </a:prstGeom>
-          <a:noFill/>
-          <a:ln/>
-        </p:spPr>
-        <p:txBody>
-          <a:bodyPr wrap="square" lIns="0" tIns="0" rIns="0" bIns="0" rtlCol="0" anchor="t"/>
+            <a:off x="896112" y="5394960"/>
+            <a:ext cx="10399471" cy="512064"/>
+          </a:xfrm>
+          <a:prstGeom prst="rect">
+            <a:avLst/>
+          </a:prstGeom>
+          <a:noFill/>
+          <a:ln/>
+        </p:spPr>
+        <p:txBody>
+          <a:bodyPr wrap="square" lIns="0" tIns="0" rIns="0" bIns="0" rtlCol="0" anchor="ctr"/>
           <a:lstStyle/>
           <a:p>
             <a:pPr indent="0" marL="0">
@@ -22925,45 +22613,6 @@
               <a:t>Kritik utamanya: pluralism berisiko terlalu permisif. Sebagian praktik keliru mendasar dan tidak layak ditoleransi.</a:t>
             </a:r>
             <a:endParaRPr lang="en-US" sz="1250" dirty="0"/>
-          </a:p>
-        </p:txBody>
-      </p:sp>
-      <p:sp>
-        <p:nvSpPr>
-          <p:cNvPr id="30" name="Text 28"/>
-          <p:cNvSpPr txBox="1"/>
-          <p:nvPr/>
-        </p:nvSpPr>
-        <p:spPr>
-          <a:xfrm>
-            <a:off x="896112" y="5724144"/>
-            <a:ext cx="10399471" cy="237744"/>
-          </a:xfrm>
-          <a:prstGeom prst="rect">
-            <a:avLst/>
-          </a:prstGeom>
-          <a:noFill/>
-          <a:ln/>
-        </p:spPr>
-        <p:txBody>
-          <a:bodyPr wrap="square" lIns="0" tIns="0" rIns="0" bIns="0" rtlCol="0" anchor="t"/>
-          <a:lstStyle/>
-          <a:p>
-            <a:pPr indent="0" marL="0">
-              <a:buNone/>
-            </a:pPr>
-            <a:r>
-              <a:rPr lang="en-US" sz="950" b="1" spc="100" kern="0" dirty="0">
-                <a:solidFill>
-                  <a:srgbClr val="6B7A90"/>
-                </a:solidFill>
-                <a:latin typeface="Calibri" pitchFamily="34" charset="0"/>
-                <a:ea typeface="Calibri" pitchFamily="34" charset="-122"/>
-                <a:cs typeface="Calibri" pitchFamily="34" charset="-120"/>
-              </a:rPr>
-              <a:t>LIU (2018)</a:t>
-            </a:r>
-            <a:endParaRPr lang="en-US" sz="950" dirty="0"/>
           </a:p>
         </p:txBody>
       </p:sp>
@@ -23094,7 +22743,7 @@
         <p:spPr>
           <a:xfrm>
             <a:off x="2699309" y="457200"/>
-            <a:ext cx="1143914" cy="283464"/>
+            <a:ext cx="1958645" cy="283464"/>
           </a:xfrm>
           <a:prstGeom prst="roundRect">
             <a:avLst>
@@ -23121,7 +22770,7 @@
         <p:spPr>
           <a:xfrm>
             <a:off x="2699309" y="457200"/>
-            <a:ext cx="1143914" cy="283464"/>
+            <a:ext cx="1958645" cy="283464"/>
           </a:xfrm>
           <a:prstGeom prst="rect">
             <a:avLst/>
@@ -23145,7 +22794,7 @@
                 <a:ea typeface="Calibri" pitchFamily="34" charset="-122"/>
                 <a:cs typeface="Calibri" pitchFamily="34" charset="-120"/>
               </a:rPr>
-              <a:t>TABEL 3.1</a:t>
+              <a:t>DUA KELUARGA BESAR</a:t>
             </a:r>
             <a:endParaRPr lang="en-US" sz="950" dirty="0"/>
           </a:p>
@@ -24108,7 +23757,7 @@
         <p:spPr>
           <a:xfrm>
             <a:off x="621792" y="457200"/>
-            <a:ext cx="1596542" cy="283464"/>
+            <a:ext cx="1506017" cy="283464"/>
           </a:xfrm>
           <a:prstGeom prst="roundRect">
             <a:avLst>
@@ -24135,46 +23784,46 @@
         <p:spPr>
           <a:xfrm>
             <a:off x="621792" y="457200"/>
+            <a:ext cx="1506017" cy="283464"/>
+          </a:xfrm>
+          <a:prstGeom prst="rect">
+            <a:avLst/>
+          </a:prstGeom>
+          <a:noFill/>
+          <a:ln/>
+        </p:spPr>
+        <p:txBody>
+          <a:bodyPr wrap="square" lIns="0" tIns="0" rIns="0" bIns="0" rtlCol="0" anchor="ctr"/>
+          <a:lstStyle/>
+          <a:p>
+            <a:pPr algn="ctr" indent="0" marL="0">
+              <a:buNone/>
+            </a:pPr>
+            <a:r>
+              <a:rPr lang="en-US" sz="950" b="1" spc="110" kern="0" dirty="0">
+                <a:solidFill>
+                  <a:srgbClr val="FFFFFF"/>
+                </a:solidFill>
+                <a:latin typeface="Calibri" pitchFamily="34" charset="0"/>
+                <a:ea typeface="Calibri" pitchFamily="34" charset="-122"/>
+                <a:cs typeface="Calibri" pitchFamily="34" charset="-120"/>
+              </a:rPr>
+              <a:t>KASUS PENGUJI</a:t>
+            </a:r>
+            <a:endParaRPr lang="en-US" sz="950" dirty="0"/>
+          </a:p>
+        </p:txBody>
+      </p:sp>
+      <p:sp>
+        <p:nvSpPr>
+          <p:cNvPr id="5" name="Shape 3"/>
+          <p:cNvSpPr/>
+          <p:nvPr/>
+        </p:nvSpPr>
+        <p:spPr>
+          <a:xfrm>
+            <a:off x="2246681" y="457200"/>
             <a:ext cx="1596542" cy="283464"/>
-          </a:xfrm>
-          <a:prstGeom prst="rect">
-            <a:avLst/>
-          </a:prstGeom>
-          <a:noFill/>
-          <a:ln/>
-        </p:spPr>
-        <p:txBody>
-          <a:bodyPr wrap="square" lIns="0" tIns="0" rIns="0" bIns="0" rtlCol="0" anchor="ctr"/>
-          <a:lstStyle/>
-          <a:p>
-            <a:pPr algn="ctr" indent="0" marL="0">
-              <a:buNone/>
-            </a:pPr>
-            <a:r>
-              <a:rPr lang="en-US" sz="950" b="1" spc="110" kern="0" dirty="0">
-                <a:solidFill>
-                  <a:srgbClr val="FFFFFF"/>
-                </a:solidFill>
-                <a:latin typeface="Calibri" pitchFamily="34" charset="0"/>
-                <a:ea typeface="Calibri" pitchFamily="34" charset="-122"/>
-                <a:cs typeface="Calibri" pitchFamily="34" charset="-120"/>
-              </a:rPr>
-              <a:t>PRODUCING TOYS</a:t>
-            </a:r>
-            <a:endParaRPr lang="en-US" sz="950" dirty="0"/>
-          </a:p>
-        </p:txBody>
-      </p:sp>
-      <p:sp>
-        <p:nvSpPr>
-          <p:cNvPr id="5" name="Shape 3"/>
-          <p:cNvSpPr/>
-          <p:nvPr/>
-        </p:nvSpPr>
-        <p:spPr>
-          <a:xfrm>
-            <a:off x="2337206" y="457200"/>
-            <a:ext cx="1234440" cy="283464"/>
           </a:xfrm>
           <a:prstGeom prst="roundRect">
             <a:avLst>
@@ -24200,8 +23849,8 @@
         </p:nvSpPr>
         <p:spPr>
           <a:xfrm>
-            <a:off x="2337206" y="457200"/>
-            <a:ext cx="1234440" cy="283464"/>
+            <a:off x="2246681" y="457200"/>
+            <a:ext cx="1596542" cy="283464"/>
           </a:xfrm>
           <a:prstGeom prst="rect">
             <a:avLst/>
@@ -24225,7 +23874,7 @@
                 <a:ea typeface="Calibri" pitchFamily="34" charset="-122"/>
                 <a:cs typeface="Calibri" pitchFamily="34" charset="-120"/>
               </a:rPr>
-              <a:t>HALAMAN 94</a:t>
+              <a:t>PRODUCING TOYS</a:t>
             </a:r>
             <a:endParaRPr lang="en-US" sz="950" dirty="0"/>
           </a:p>
@@ -25167,17 +24816,17 @@
         </p:nvSpPr>
         <p:spPr>
           <a:xfrm>
-            <a:off x="896112" y="1682496"/>
-            <a:ext cx="10399471" cy="420624"/>
-          </a:xfrm>
-          <a:prstGeom prst="rect">
-            <a:avLst/>
-          </a:prstGeom>
-          <a:noFill/>
-          <a:ln/>
-        </p:spPr>
-        <p:txBody>
-          <a:bodyPr wrap="square" lIns="0" tIns="0" rIns="0" bIns="0" rtlCol="0" anchor="t"/>
+            <a:off x="896112" y="1609344"/>
+            <a:ext cx="10399471" cy="566928"/>
+          </a:xfrm>
+          <a:prstGeom prst="rect">
+            <a:avLst/>
+          </a:prstGeom>
+          <a:noFill/>
+          <a:ln/>
+        </p:spPr>
+        <p:txBody>
+          <a:bodyPr wrap="square" lIns="0" tIns="0" rIns="0" bIns="0" rtlCol="0" anchor="ctr"/>
           <a:lstStyle/>
           <a:p>
             <a:pPr indent="0" marL="0">
@@ -25362,7 +25011,7 @@
                 <a:ea typeface="Calibri" pitchFamily="34" charset="-122"/>
                 <a:cs typeface="Calibri" pitchFamily="34" charset="-120"/>
               </a:rPr>
-              <a:t>Smith (1776): agregasi kepentingan diri menghasilkan kesejahteraan kolektif melalui mekanisme pasar.</a:t>
+              <a:t>Agregasi kepentingan diri menghasilkan kesejahteraan kolektif melalui mekanisme pasar.</a:t>
             </a:r>
             <a:endParaRPr lang="en-US" sz="1150" dirty="0"/>
           </a:p>
@@ -26098,17 +25747,17 @@
         </p:nvSpPr>
         <p:spPr>
           <a:xfrm>
-            <a:off x="896112" y="1682496"/>
-            <a:ext cx="10399471" cy="420624"/>
-          </a:xfrm>
-          <a:prstGeom prst="rect">
-            <a:avLst/>
-          </a:prstGeom>
-          <a:noFill/>
-          <a:ln/>
-        </p:spPr>
-        <p:txBody>
-          <a:bodyPr wrap="square" lIns="0" tIns="0" rIns="0" bIns="0" rtlCol="0" anchor="t"/>
+            <a:off x="896112" y="1609344"/>
+            <a:ext cx="10399471" cy="566928"/>
+          </a:xfrm>
+          <a:prstGeom prst="rect">
+            <a:avLst/>
+          </a:prstGeom>
+          <a:noFill/>
+          <a:ln/>
+        </p:spPr>
+        <p:txBody>
+          <a:bodyPr wrap="square" lIns="0" tIns="0" rIns="0" bIns="0" rtlCol="0" anchor="ctr"/>
           <a:lstStyle/>
           <a:p>
             <a:pPr indent="0" marL="0">
